--- a/presentation.pptx
+++ b/presentation.pptx
@@ -212,7 +212,7 @@
           <a:p>
             <a:fld id="{9CF9DDCD-6582-4FC2-87A2-FA2F2F89B44A}" type="datetimeFigureOut">
               <a:rPr lang="ru-RU" smtClean="0"/>
-              <a:t>22.04.2026</a:t>
+              <a:t>29.04.2026</a:t>
             </a:fld>
             <a:endParaRPr lang="ru-RU"/>
           </a:p>
@@ -710,7 +710,7 @@
           <a:p>
             <a:fld id="{E2D3E6BD-B4C5-4C5E-AC73-5E733A3CDA2C}" type="datetime1">
               <a:rPr lang="ru-RU" smtClean="0"/>
-              <a:t>22.04.2026</a:t>
+              <a:t>29.04.2026</a:t>
             </a:fld>
             <a:endParaRPr lang="ru-RU"/>
           </a:p>
@@ -908,7 +908,7 @@
           <a:p>
             <a:fld id="{D7D4D24D-E8DE-46D2-B2EA-B77A9C5FF877}" type="datetime1">
               <a:rPr lang="ru-RU" smtClean="0"/>
-              <a:t>22.04.2026</a:t>
+              <a:t>29.04.2026</a:t>
             </a:fld>
             <a:endParaRPr lang="ru-RU"/>
           </a:p>
@@ -1116,7 +1116,7 @@
           <a:p>
             <a:fld id="{67B76F11-00B9-4E07-B295-6CA67D2F7E8B}" type="datetime1">
               <a:rPr lang="ru-RU" smtClean="0"/>
-              <a:t>22.04.2026</a:t>
+              <a:t>29.04.2026</a:t>
             </a:fld>
             <a:endParaRPr lang="ru-RU"/>
           </a:p>
@@ -1314,7 +1314,7 @@
           <a:p>
             <a:fld id="{63954F16-EF89-444B-B5EE-096ABF5F48C7}" type="datetime1">
               <a:rPr lang="ru-RU" smtClean="0"/>
-              <a:t>22.04.2026</a:t>
+              <a:t>29.04.2026</a:t>
             </a:fld>
             <a:endParaRPr lang="ru-RU"/>
           </a:p>
@@ -1589,7 +1589,7 @@
           <a:p>
             <a:fld id="{26E6D5F6-1A3B-4480-A930-7B5D513F4301}" type="datetime1">
               <a:rPr lang="ru-RU" smtClean="0"/>
-              <a:t>22.04.2026</a:t>
+              <a:t>29.04.2026</a:t>
             </a:fld>
             <a:endParaRPr lang="ru-RU"/>
           </a:p>
@@ -1854,7 +1854,7 @@
           <a:p>
             <a:fld id="{C0461997-42E7-4A3D-AFD9-A4B06E9A2CD4}" type="datetime1">
               <a:rPr lang="ru-RU" smtClean="0"/>
-              <a:t>22.04.2026</a:t>
+              <a:t>29.04.2026</a:t>
             </a:fld>
             <a:endParaRPr lang="ru-RU"/>
           </a:p>
@@ -2266,7 +2266,7 @@
           <a:p>
             <a:fld id="{00D1E04C-46DC-49F7-BB58-C0F68A028918}" type="datetime1">
               <a:rPr lang="ru-RU" smtClean="0"/>
-              <a:t>22.04.2026</a:t>
+              <a:t>29.04.2026</a:t>
             </a:fld>
             <a:endParaRPr lang="ru-RU"/>
           </a:p>
@@ -2407,7 +2407,7 @@
           <a:p>
             <a:fld id="{42BDAAF7-7DCA-4B59-8EFF-412AF87020B2}" type="datetime1">
               <a:rPr lang="ru-RU" smtClean="0"/>
-              <a:t>22.04.2026</a:t>
+              <a:t>29.04.2026</a:t>
             </a:fld>
             <a:endParaRPr lang="ru-RU"/>
           </a:p>
@@ -2520,7 +2520,7 @@
           <a:p>
             <a:fld id="{09C9192A-75AA-4314-85F0-C37E684E0F1B}" type="datetime1">
               <a:rPr lang="ru-RU" smtClean="0"/>
-              <a:t>22.04.2026</a:t>
+              <a:t>29.04.2026</a:t>
             </a:fld>
             <a:endParaRPr lang="ru-RU"/>
           </a:p>
@@ -2831,7 +2831,7 @@
           <a:p>
             <a:fld id="{1EA6CD73-1DC1-4CCB-8639-48CA902A4BE7}" type="datetime1">
               <a:rPr lang="ru-RU" smtClean="0"/>
-              <a:t>22.04.2026</a:t>
+              <a:t>29.04.2026</a:t>
             </a:fld>
             <a:endParaRPr lang="ru-RU"/>
           </a:p>
@@ -3119,7 +3119,7 @@
           <a:p>
             <a:fld id="{25FEEA16-318D-49A8-B19A-6FCF07807A8C}" type="datetime1">
               <a:rPr lang="ru-RU" smtClean="0"/>
-              <a:t>22.04.2026</a:t>
+              <a:t>29.04.2026</a:t>
             </a:fld>
             <a:endParaRPr lang="ru-RU"/>
           </a:p>
@@ -3360,7 +3360,7 @@
           <a:p>
             <a:fld id="{29DA6B07-345E-41F3-AB13-E427DFAF8E87}" type="datetime1">
               <a:rPr lang="ru-RU" smtClean="0"/>
-              <a:t>22.04.2026</a:t>
+              <a:t>29.04.2026</a:t>
             </a:fld>
             <a:endParaRPr lang="ru-RU"/>
           </a:p>
@@ -3922,7 +3922,7 @@
         <p:spPr>
           <a:xfrm>
             <a:off x="1413130" y="325135"/>
-            <a:ext cx="10023895" cy="1323439"/>
+            <a:ext cx="10023895" cy="1077218"/>
           </a:xfrm>
           <a:prstGeom prst="rect">
             <a:avLst/>
@@ -3934,23 +3934,6 @@
             <a:spAutoFit/>
           </a:bodyPr>
           <a:lstStyle/>
-          <a:p>
-            <a:pPr algn="ctr"/>
-            <a:r>
-              <a:rPr lang="ru-RU" sz="1600" b="1" dirty="0">
-                <a:effectLst/>
-                <a:latin typeface="Times New Roman" panose="02020603050405020304" pitchFamily="18" charset="0"/>
-                <a:ea typeface="Times New Roman" panose="02020603050405020304" pitchFamily="18" charset="0"/>
-                <a:cs typeface="Liberation Serif"/>
-              </a:rPr>
-              <a:t>Министерство науки и высшего образования Российской Федерации</a:t>
-            </a:r>
-            <a:endParaRPr lang="ru-RU" sz="1600" dirty="0">
-              <a:effectLst/>
-              <a:latin typeface="Times New Roman" panose="02020603050405020304" pitchFamily="18" charset="0"/>
-              <a:ea typeface="Times New Roman" panose="02020603050405020304" pitchFamily="18" charset="0"/>
-            </a:endParaRPr>
-          </a:p>
           <a:p>
             <a:pPr algn="ctr"/>
             <a:r>
@@ -6589,13 +6572,13 @@
         </p:nvSpPr>
         <p:spPr>
           <a:xfrm>
-            <a:off x="838200" y="1825625"/>
-            <a:ext cx="10850592" cy="4351338"/>
+            <a:off x="534429" y="1817387"/>
+            <a:ext cx="11385722" cy="4351338"/>
           </a:xfrm>
         </p:spPr>
         <p:txBody>
           <a:bodyPr>
-            <a:normAutofit fontScale="92500"/>
+            <a:normAutofit/>
           </a:bodyPr>
           <a:lstStyle/>
           <a:p>
@@ -6642,32 +6625,53 @@
               <a:buChar char="-"/>
             </a:pPr>
             <a:r>
-              <a:rPr lang="ru-RU" dirty="0">
+              <a:rPr lang="ru-RU" sz="2400" dirty="0">
                 <a:latin typeface="Times New Roman" panose="02020603050405020304" pitchFamily="18" charset="0"/>
                 <a:cs typeface="Times New Roman" panose="02020603050405020304" pitchFamily="18" charset="0"/>
               </a:rPr>
-              <a:t>п</a:t>
-            </a:r>
-            <a:r>
-              <a:rPr lang="ru-RU" sz="2800" dirty="0">
+              <a:t>провести сравнительный анализ методов</a:t>
+            </a:r>
+            <a:r>
+              <a:rPr lang="en-US" sz="2400" dirty="0">
                 <a:latin typeface="Times New Roman" panose="02020603050405020304" pitchFamily="18" charset="0"/>
                 <a:cs typeface="Times New Roman" panose="02020603050405020304" pitchFamily="18" charset="0"/>
               </a:rPr>
-              <a:t>ровести анализ предметной области и сравнительный анализ существующих</a:t>
-            </a:r>
-            <a:r>
-              <a:rPr lang="vi-VN" sz="2800" dirty="0">
+              <a:t> </a:t>
+            </a:r>
+            <a:r>
+              <a:rPr lang="ru-RU" sz="2400" dirty="0">
                 <a:latin typeface="Times New Roman" panose="02020603050405020304" pitchFamily="18" charset="0"/>
                 <a:cs typeface="Times New Roman" panose="02020603050405020304" pitchFamily="18" charset="0"/>
               </a:rPr>
-              <a:t> </a:t>
-            </a:r>
-            <a:r>
-              <a:rPr lang="ru-RU" sz="2800" dirty="0">
+              <a:t>обнаружения</a:t>
+            </a:r>
+            <a:r>
+              <a:rPr lang="en-US" sz="2400" dirty="0">
                 <a:latin typeface="Times New Roman" panose="02020603050405020304" pitchFamily="18" charset="0"/>
                 <a:cs typeface="Times New Roman" panose="02020603050405020304" pitchFamily="18" charset="0"/>
               </a:rPr>
-              <a:t>методов;</a:t>
+              <a:t> </a:t>
+            </a:r>
+            <a:r>
+              <a:rPr lang="ru-RU" sz="2400" dirty="0">
+                <a:latin typeface="Times New Roman" panose="02020603050405020304" pitchFamily="18" charset="0"/>
+                <a:cs typeface="Times New Roman" panose="02020603050405020304" pitchFamily="18" charset="0"/>
+              </a:rPr>
+              <a:t>фальсифицированного</a:t>
+            </a:r>
+            <a:r>
+              <a:rPr lang="en-US" sz="2400" dirty="0">
+                <a:latin typeface="Times New Roman" panose="02020603050405020304" pitchFamily="18" charset="0"/>
+                <a:cs typeface="Times New Roman" panose="02020603050405020304" pitchFamily="18" charset="0"/>
+              </a:rPr>
+              <a:t> </a:t>
+            </a:r>
+            <a:r>
+              <a:rPr lang="ru-RU" sz="2400" dirty="0">
+                <a:latin typeface="Times New Roman" panose="02020603050405020304" pitchFamily="18" charset="0"/>
+                <a:cs typeface="Times New Roman" panose="02020603050405020304" pitchFamily="18" charset="0"/>
+              </a:rPr>
+              <a:t>фрагмента на изображении ;</a:t>
             </a:r>
           </a:p>
           <a:p>
@@ -6676,18 +6680,11 @@
               <a:buChar char="-"/>
             </a:pPr>
             <a:r>
-              <a:rPr lang="ru-RU" dirty="0">
+              <a:rPr lang="ru-RU" sz="2400" dirty="0">
                 <a:latin typeface="Times New Roman" panose="02020603050405020304" pitchFamily="18" charset="0"/>
                 <a:cs typeface="Times New Roman" panose="02020603050405020304" pitchFamily="18" charset="0"/>
               </a:rPr>
-              <a:t>спроектировать метод обнаружения фальсифицированного фрагмента на изображении с использованием сверточной нейронной сети</a:t>
-            </a:r>
-            <a:r>
-              <a:rPr lang="ru-RU" sz="2800" dirty="0">
-                <a:latin typeface="Times New Roman" panose="02020603050405020304" pitchFamily="18" charset="0"/>
-                <a:cs typeface="Times New Roman" panose="02020603050405020304" pitchFamily="18" charset="0"/>
-              </a:rPr>
-              <a:t>;</a:t>
+              <a:t>разработать метод обнаружения фальсифицированного фрагмента на изображении с использованием сверточной нейронной сети;</a:t>
             </a:r>
           </a:p>
           <a:p>
@@ -6696,7 +6693,7 @@
               <a:buChar char="-"/>
             </a:pPr>
             <a:r>
-              <a:rPr lang="ru-RU" dirty="0">
+              <a:rPr lang="ru-RU" sz="2400" dirty="0">
                 <a:latin typeface="Times New Roman" panose="02020603050405020304" pitchFamily="18" charset="0"/>
                 <a:cs typeface="Times New Roman" panose="02020603050405020304" pitchFamily="18" charset="0"/>
               </a:rPr>
@@ -6709,16 +6706,12 @@
               <a:buChar char="-"/>
             </a:pPr>
             <a:r>
-              <a:rPr lang="ru-RU" dirty="0">
+              <a:rPr lang="ru-RU" sz="2400" dirty="0">
                 <a:latin typeface="Times New Roman" panose="02020603050405020304" pitchFamily="18" charset="0"/>
                 <a:cs typeface="Times New Roman" panose="02020603050405020304" pitchFamily="18" charset="0"/>
               </a:rPr>
-              <a:t>провести оценку качества реализованный метода.</a:t>
-            </a:r>
-            <a:endParaRPr lang="ru-RU" sz="2800" dirty="0">
-              <a:latin typeface="Times New Roman" panose="02020603050405020304" pitchFamily="18" charset="0"/>
-              <a:cs typeface="Times New Roman" panose="02020603050405020304" pitchFamily="18" charset="0"/>
-            </a:endParaRPr>
+              <a:t>провести исследование эффективности реализованного метода.</a:t>
+            </a:r>
           </a:p>
           <a:p>
             <a:pPr marL="0" indent="0">
@@ -8728,41 +8721,6 @@
           </a:p>
         </p:txBody>
       </p:sp>
-      <p:pic>
-        <p:nvPicPr>
-          <p:cNvPr id="14" name="Content Placeholder 13">
-            <a:extLst>
-              <a:ext uri="{FF2B5EF4-FFF2-40B4-BE49-F238E27FC236}">
-                <a16:creationId xmlns:a16="http://schemas.microsoft.com/office/drawing/2014/main" id="{0B5EB20E-B802-DC20-84FD-1BD25EAFA4EF}"/>
-              </a:ext>
-            </a:extLst>
-          </p:cNvPr>
-          <p:cNvPicPr>
-            <a:picLocks noGrp="1" noChangeAspect="1"/>
-          </p:cNvPicPr>
-          <p:nvPr>
-            <p:ph idx="1"/>
-          </p:nvPr>
-        </p:nvPicPr>
-        <p:blipFill>
-          <a:blip r:embed="rId2">
-            <a:extLst>
-              <a:ext uri="{28A0092B-C50C-407E-A947-70E740481C1C}">
-                <a14:useLocalDpi xmlns:a14="http://schemas.microsoft.com/office/drawing/2010/main" val="0"/>
-              </a:ext>
-            </a:extLst>
-          </a:blip>
-          <a:stretch>
-            <a:fillRect/>
-          </a:stretch>
-        </p:blipFill>
-        <p:spPr>
-          <a:xfrm>
-            <a:off x="7343505" y="1084859"/>
-            <a:ext cx="1586310" cy="5471969"/>
-          </a:xfrm>
-        </p:spPr>
-      </p:pic>
       <p:sp>
         <p:nvSpPr>
           <p:cNvPr id="16" name="TextBox 15">
@@ -8835,6 +8793,41 @@
           </a:p>
         </p:txBody>
       </p:sp>
+      <p:pic>
+        <p:nvPicPr>
+          <p:cNvPr id="7" name="Content Placeholder 6">
+            <a:extLst>
+              <a:ext uri="{FF2B5EF4-FFF2-40B4-BE49-F238E27FC236}">
+                <a16:creationId xmlns:a16="http://schemas.microsoft.com/office/drawing/2014/main" id="{24E75607-6ACE-BA33-965E-7172469A03C8}"/>
+              </a:ext>
+            </a:extLst>
+          </p:cNvPr>
+          <p:cNvPicPr>
+            <a:picLocks noGrp="1" noChangeAspect="1"/>
+          </p:cNvPicPr>
+          <p:nvPr>
+            <p:ph idx="1"/>
+          </p:nvPr>
+        </p:nvPicPr>
+        <p:blipFill>
+          <a:blip r:embed="rId2">
+            <a:extLst>
+              <a:ext uri="{28A0092B-C50C-407E-A947-70E740481C1C}">
+                <a14:useLocalDpi xmlns:a14="http://schemas.microsoft.com/office/drawing/2010/main" val="0"/>
+              </a:ext>
+            </a:extLst>
+          </a:blip>
+          <a:stretch>
+            <a:fillRect/>
+          </a:stretch>
+        </p:blipFill>
+        <p:spPr>
+          <a:xfrm>
+            <a:off x="8224071" y="856145"/>
+            <a:ext cx="1758129" cy="5500205"/>
+          </a:xfrm>
+        </p:spPr>
+      </p:pic>
     </p:spTree>
     <p:extLst>
       <p:ext uri="{BB962C8B-B14F-4D97-AF65-F5344CB8AC3E}">

--- a/presentation.pptx
+++ b/presentation.pptx
@@ -212,7 +212,7 @@
           <a:p>
             <a:fld id="{9CF9DDCD-6582-4FC2-87A2-FA2F2F89B44A}" type="datetimeFigureOut">
               <a:rPr lang="ru-RU" smtClean="0"/>
-              <a:t>29.04.2026</a:t>
+              <a:t>15.06.2026</a:t>
             </a:fld>
             <a:endParaRPr lang="ru-RU"/>
           </a:p>
@@ -710,7 +710,7 @@
           <a:p>
             <a:fld id="{E2D3E6BD-B4C5-4C5E-AC73-5E733A3CDA2C}" type="datetime1">
               <a:rPr lang="ru-RU" smtClean="0"/>
-              <a:t>29.04.2026</a:t>
+              <a:t>15.06.2026</a:t>
             </a:fld>
             <a:endParaRPr lang="ru-RU"/>
           </a:p>
@@ -908,7 +908,7 @@
           <a:p>
             <a:fld id="{D7D4D24D-E8DE-46D2-B2EA-B77A9C5FF877}" type="datetime1">
               <a:rPr lang="ru-RU" smtClean="0"/>
-              <a:t>29.04.2026</a:t>
+              <a:t>15.06.2026</a:t>
             </a:fld>
             <a:endParaRPr lang="ru-RU"/>
           </a:p>
@@ -1116,7 +1116,7 @@
           <a:p>
             <a:fld id="{67B76F11-00B9-4E07-B295-6CA67D2F7E8B}" type="datetime1">
               <a:rPr lang="ru-RU" smtClean="0"/>
-              <a:t>29.04.2026</a:t>
+              <a:t>15.06.2026</a:t>
             </a:fld>
             <a:endParaRPr lang="ru-RU"/>
           </a:p>
@@ -1314,7 +1314,7 @@
           <a:p>
             <a:fld id="{63954F16-EF89-444B-B5EE-096ABF5F48C7}" type="datetime1">
               <a:rPr lang="ru-RU" smtClean="0"/>
-              <a:t>29.04.2026</a:t>
+              <a:t>15.06.2026</a:t>
             </a:fld>
             <a:endParaRPr lang="ru-RU"/>
           </a:p>
@@ -1589,7 +1589,7 @@
           <a:p>
             <a:fld id="{26E6D5F6-1A3B-4480-A930-7B5D513F4301}" type="datetime1">
               <a:rPr lang="ru-RU" smtClean="0"/>
-              <a:t>29.04.2026</a:t>
+              <a:t>15.06.2026</a:t>
             </a:fld>
             <a:endParaRPr lang="ru-RU"/>
           </a:p>
@@ -1854,7 +1854,7 @@
           <a:p>
             <a:fld id="{C0461997-42E7-4A3D-AFD9-A4B06E9A2CD4}" type="datetime1">
               <a:rPr lang="ru-RU" smtClean="0"/>
-              <a:t>29.04.2026</a:t>
+              <a:t>15.06.2026</a:t>
             </a:fld>
             <a:endParaRPr lang="ru-RU"/>
           </a:p>
@@ -2266,7 +2266,7 @@
           <a:p>
             <a:fld id="{00D1E04C-46DC-49F7-BB58-C0F68A028918}" type="datetime1">
               <a:rPr lang="ru-RU" smtClean="0"/>
-              <a:t>29.04.2026</a:t>
+              <a:t>15.06.2026</a:t>
             </a:fld>
             <a:endParaRPr lang="ru-RU"/>
           </a:p>
@@ -2407,7 +2407,7 @@
           <a:p>
             <a:fld id="{42BDAAF7-7DCA-4B59-8EFF-412AF87020B2}" type="datetime1">
               <a:rPr lang="ru-RU" smtClean="0"/>
-              <a:t>29.04.2026</a:t>
+              <a:t>15.06.2026</a:t>
             </a:fld>
             <a:endParaRPr lang="ru-RU"/>
           </a:p>
@@ -2520,7 +2520,7 @@
           <a:p>
             <a:fld id="{09C9192A-75AA-4314-85F0-C37E684E0F1B}" type="datetime1">
               <a:rPr lang="ru-RU" smtClean="0"/>
-              <a:t>29.04.2026</a:t>
+              <a:t>15.06.2026</a:t>
             </a:fld>
             <a:endParaRPr lang="ru-RU"/>
           </a:p>
@@ -2831,7 +2831,7 @@
           <a:p>
             <a:fld id="{1EA6CD73-1DC1-4CCB-8639-48CA902A4BE7}" type="datetime1">
               <a:rPr lang="ru-RU" smtClean="0"/>
-              <a:t>29.04.2026</a:t>
+              <a:t>15.06.2026</a:t>
             </a:fld>
             <a:endParaRPr lang="ru-RU"/>
           </a:p>
@@ -3119,7 +3119,7 @@
           <a:p>
             <a:fld id="{25FEEA16-318D-49A8-B19A-6FCF07807A8C}" type="datetime1">
               <a:rPr lang="ru-RU" smtClean="0"/>
-              <a:t>29.04.2026</a:t>
+              <a:t>15.06.2026</a:t>
             </a:fld>
             <a:endParaRPr lang="ru-RU"/>
           </a:p>
@@ -3360,7 +3360,7 @@
           <a:p>
             <a:fld id="{29DA6B07-345E-41F3-AB13-E427DFAF8E87}" type="datetime1">
               <a:rPr lang="ru-RU" smtClean="0"/>
-              <a:t>29.04.2026</a:t>
+              <a:t>15.06.2026</a:t>
             </a:fld>
             <a:endParaRPr lang="ru-RU"/>
           </a:p>
@@ -8376,12 +8376,41 @@
           </a:p>
         </p:txBody>
       </p:sp>
+      <p:sp>
+        <p:nvSpPr>
+          <p:cNvPr id="4" name="Slide Number Placeholder 3">
+            <a:extLst>
+              <a:ext uri="{FF2B5EF4-FFF2-40B4-BE49-F238E27FC236}">
+                <a16:creationId xmlns:a16="http://schemas.microsoft.com/office/drawing/2014/main" id="{DD74FC4E-67B8-1E67-08BB-732214DD17A3}"/>
+              </a:ext>
+            </a:extLst>
+          </p:cNvPr>
+          <p:cNvSpPr>
+            <a:spLocks noGrp="1"/>
+          </p:cNvSpPr>
+          <p:nvPr>
+            <p:ph type="sldNum" sz="quarter" idx="12"/>
+          </p:nvPr>
+        </p:nvSpPr>
+        <p:spPr/>
+        <p:txBody>
+          <a:bodyPr/>
+          <a:lstStyle/>
+          <a:p>
+            <a:fld id="{6FFD2179-D880-4E7E-97D2-571DE9C9E0F7}" type="slidenum">
+              <a:rPr lang="ru-RU" smtClean="0"/>
+              <a:t>5</a:t>
+            </a:fld>
+            <a:endParaRPr lang="ru-RU"/>
+          </a:p>
+        </p:txBody>
+      </p:sp>
       <p:pic>
         <p:nvPicPr>
-          <p:cNvPr id="6" name="Content Placeholder 5">
-            <a:extLst>
-              <a:ext uri="{FF2B5EF4-FFF2-40B4-BE49-F238E27FC236}">
-                <a16:creationId xmlns:a16="http://schemas.microsoft.com/office/drawing/2014/main" id="{D9833AD1-4BFF-1B63-7C9F-66C91F5561BE}"/>
+          <p:cNvPr id="12" name="Content Placeholder 11">
+            <a:extLst>
+              <a:ext uri="{FF2B5EF4-FFF2-40B4-BE49-F238E27FC236}">
+                <a16:creationId xmlns:a16="http://schemas.microsoft.com/office/drawing/2014/main" id="{CB0DB399-DBEE-609D-387C-28C5E85B00E7}"/>
               </a:ext>
             </a:extLst>
           </p:cNvPr>
@@ -8406,40 +8435,11 @@
         </p:blipFill>
         <p:spPr>
           <a:xfrm>
-            <a:off x="2477023" y="1825625"/>
-            <a:ext cx="7237954" cy="4351338"/>
+            <a:off x="2084756" y="1825625"/>
+            <a:ext cx="8022488" cy="4351338"/>
           </a:xfrm>
         </p:spPr>
       </p:pic>
-      <p:sp>
-        <p:nvSpPr>
-          <p:cNvPr id="4" name="Slide Number Placeholder 3">
-            <a:extLst>
-              <a:ext uri="{FF2B5EF4-FFF2-40B4-BE49-F238E27FC236}">
-                <a16:creationId xmlns:a16="http://schemas.microsoft.com/office/drawing/2014/main" id="{DD74FC4E-67B8-1E67-08BB-732214DD17A3}"/>
-              </a:ext>
-            </a:extLst>
-          </p:cNvPr>
-          <p:cNvSpPr>
-            <a:spLocks noGrp="1"/>
-          </p:cNvSpPr>
-          <p:nvPr>
-            <p:ph type="sldNum" sz="quarter" idx="12"/>
-          </p:nvPr>
-        </p:nvSpPr>
-        <p:spPr/>
-        <p:txBody>
-          <a:bodyPr/>
-          <a:lstStyle/>
-          <a:p>
-            <a:fld id="{6FFD2179-D880-4E7E-97D2-571DE9C9E0F7}" type="slidenum">
-              <a:rPr lang="ru-RU" smtClean="0"/>
-              <a:t>5</a:t>
-            </a:fld>
-            <a:endParaRPr lang="ru-RU"/>
-          </a:p>
-        </p:txBody>
-      </p:sp>
     </p:spTree>
     <p:extLst>
       <p:ext uri="{BB962C8B-B14F-4D97-AF65-F5344CB8AC3E}">
@@ -8593,10 +8593,10 @@
       </p:sp>
       <p:pic>
         <p:nvPicPr>
-          <p:cNvPr id="7" name="Content Placeholder 6">
-            <a:extLst>
-              <a:ext uri="{FF2B5EF4-FFF2-40B4-BE49-F238E27FC236}">
-                <a16:creationId xmlns:a16="http://schemas.microsoft.com/office/drawing/2014/main" id="{F71E8535-7C79-DA23-3ACC-C866FA9AD0F3}"/>
+          <p:cNvPr id="8" name="Content Placeholder 7">
+            <a:extLst>
+              <a:ext uri="{FF2B5EF4-FFF2-40B4-BE49-F238E27FC236}">
+                <a16:creationId xmlns:a16="http://schemas.microsoft.com/office/drawing/2014/main" id="{13F66A29-10FA-7EA5-D984-F0D48BAFF901}"/>
               </a:ext>
             </a:extLst>
           </p:cNvPr>
@@ -8621,8 +8621,8 @@
         </p:blipFill>
         <p:spPr>
           <a:xfrm>
-            <a:off x="1409678" y="1825625"/>
-            <a:ext cx="9372643" cy="4351338"/>
+            <a:off x="1200745" y="1825625"/>
+            <a:ext cx="9790510" cy="4351338"/>
           </a:xfrm>
         </p:spPr>
       </p:pic>
@@ -8925,10 +8925,10 @@
       </p:sp>
       <p:pic>
         <p:nvPicPr>
-          <p:cNvPr id="15" name="Content Placeholder 14">
-            <a:extLst>
-              <a:ext uri="{FF2B5EF4-FFF2-40B4-BE49-F238E27FC236}">
-                <a16:creationId xmlns:a16="http://schemas.microsoft.com/office/drawing/2014/main" id="{8CC4210E-522F-FAE5-D4B0-FFE0547E1B03}"/>
+          <p:cNvPr id="7" name="Content Placeholder 6">
+            <a:extLst>
+              <a:ext uri="{FF2B5EF4-FFF2-40B4-BE49-F238E27FC236}">
+                <a16:creationId xmlns:a16="http://schemas.microsoft.com/office/drawing/2014/main" id="{88F301C4-163F-F4FD-39C3-40969640455F}"/>
               </a:ext>
             </a:extLst>
           </p:cNvPr>
@@ -8953,8 +8953,8 @@
         </p:blipFill>
         <p:spPr>
           <a:xfrm>
-            <a:off x="1712992" y="1591897"/>
-            <a:ext cx="8766016" cy="3674205"/>
+            <a:off x="1556952" y="1328252"/>
+            <a:ext cx="8822724" cy="4822934"/>
           </a:xfrm>
         </p:spPr>
       </p:pic>
@@ -9056,10 +9056,10 @@
       </p:sp>
       <p:pic>
         <p:nvPicPr>
-          <p:cNvPr id="6" name="Picture 5">
-            <a:extLst>
-              <a:ext uri="{FF2B5EF4-FFF2-40B4-BE49-F238E27FC236}">
-                <a16:creationId xmlns:a16="http://schemas.microsoft.com/office/drawing/2014/main" id="{0A2580DA-489D-97C3-22A8-EB61F3032774}"/>
+          <p:cNvPr id="10" name="Picture 9">
+            <a:extLst>
+              <a:ext uri="{FF2B5EF4-FFF2-40B4-BE49-F238E27FC236}">
+                <a16:creationId xmlns:a16="http://schemas.microsoft.com/office/drawing/2014/main" id="{7DB933BA-E1BB-9205-7AA8-241F5D7E8B6B}"/>
               </a:ext>
             </a:extLst>
           </p:cNvPr>
@@ -9082,20 +9082,113 @@
         </p:blipFill>
         <p:spPr>
           <a:xfrm>
-            <a:off x="3405065" y="2499717"/>
-            <a:ext cx="1220228" cy="3337979"/>
+            <a:off x="2076008" y="2306568"/>
+            <a:ext cx="1419225" cy="3724275"/>
           </a:xfrm>
           <a:prstGeom prst="rect">
             <a:avLst/>
           </a:prstGeom>
         </p:spPr>
       </p:pic>
+      <p:sp>
+        <p:nvSpPr>
+          <p:cNvPr id="17" name="TextBox 16">
+            <a:extLst>
+              <a:ext uri="{FF2B5EF4-FFF2-40B4-BE49-F238E27FC236}">
+                <a16:creationId xmlns:a16="http://schemas.microsoft.com/office/drawing/2014/main" id="{1439F920-A855-3B49-F266-A6D989117B40}"/>
+              </a:ext>
+            </a:extLst>
+          </p:cNvPr>
+          <p:cNvSpPr txBox="1"/>
+          <p:nvPr/>
+        </p:nvSpPr>
+        <p:spPr>
+          <a:xfrm>
+            <a:off x="1875484" y="1343818"/>
+            <a:ext cx="1827552" cy="646331"/>
+          </a:xfrm>
+          <a:prstGeom prst="rect">
+            <a:avLst/>
+          </a:prstGeom>
+          <a:noFill/>
+        </p:spPr>
+        <p:txBody>
+          <a:bodyPr wrap="none" rtlCol="0">
+            <a:spAutoFit/>
+          </a:bodyPr>
+          <a:lstStyle/>
+          <a:p>
+            <a:r>
+              <a:rPr lang="ru-RU" dirty="0">
+                <a:latin typeface="Times New Roman" panose="02020603050405020304" pitchFamily="18" charset="0"/>
+                <a:cs typeface="Times New Roman" panose="02020603050405020304" pitchFamily="18" charset="0"/>
+              </a:rPr>
+              <a:t>Слой адаптации </a:t>
+            </a:r>
+          </a:p>
+          <a:p>
+            <a:r>
+              <a:rPr lang="ru-RU" dirty="0">
+                <a:latin typeface="Times New Roman" panose="02020603050405020304" pitchFamily="18" charset="0"/>
+                <a:cs typeface="Times New Roman" panose="02020603050405020304" pitchFamily="18" charset="0"/>
+              </a:rPr>
+              <a:t>признаков</a:t>
+            </a:r>
+            <a:endParaRPr lang="en-US" dirty="0">
+              <a:latin typeface="Times New Roman" panose="02020603050405020304" pitchFamily="18" charset="0"/>
+              <a:cs typeface="Times New Roman" panose="02020603050405020304" pitchFamily="18" charset="0"/>
+            </a:endParaRPr>
+          </a:p>
+        </p:txBody>
+      </p:sp>
+      <p:sp>
+        <p:nvSpPr>
+          <p:cNvPr id="18" name="TextBox 17">
+            <a:extLst>
+              <a:ext uri="{FF2B5EF4-FFF2-40B4-BE49-F238E27FC236}">
+                <a16:creationId xmlns:a16="http://schemas.microsoft.com/office/drawing/2014/main" id="{B3D933DA-81A9-2E96-2613-F8DC26E353BC}"/>
+              </a:ext>
+            </a:extLst>
+          </p:cNvPr>
+          <p:cNvSpPr txBox="1"/>
+          <p:nvPr/>
+        </p:nvSpPr>
+        <p:spPr>
+          <a:xfrm>
+            <a:off x="5949778" y="1297651"/>
+            <a:ext cx="1705916" cy="369332"/>
+          </a:xfrm>
+          <a:prstGeom prst="rect">
+            <a:avLst/>
+          </a:prstGeom>
+          <a:noFill/>
+        </p:spPr>
+        <p:txBody>
+          <a:bodyPr wrap="none" rtlCol="0">
+            <a:spAutoFit/>
+          </a:bodyPr>
+          <a:lstStyle/>
+          <a:p>
+            <a:r>
+              <a:rPr lang="ru-RU" dirty="0">
+                <a:latin typeface="Times New Roman" panose="02020603050405020304" pitchFamily="18" charset="0"/>
+                <a:cs typeface="Times New Roman" panose="02020603050405020304" pitchFamily="18" charset="0"/>
+              </a:rPr>
+              <a:t>Слой внимания</a:t>
+            </a:r>
+            <a:endParaRPr lang="en-US" dirty="0">
+              <a:latin typeface="Times New Roman" panose="02020603050405020304" pitchFamily="18" charset="0"/>
+              <a:cs typeface="Times New Roman" panose="02020603050405020304" pitchFamily="18" charset="0"/>
+            </a:endParaRPr>
+          </a:p>
+        </p:txBody>
+      </p:sp>
       <p:pic>
         <p:nvPicPr>
-          <p:cNvPr id="8" name="Picture 7">
-            <a:extLst>
-              <a:ext uri="{FF2B5EF4-FFF2-40B4-BE49-F238E27FC236}">
-                <a16:creationId xmlns:a16="http://schemas.microsoft.com/office/drawing/2014/main" id="{CB30FE3D-9FE4-6561-DC8C-2925C969C6D7}"/>
+          <p:cNvPr id="20" name="Picture 19">
+            <a:extLst>
+              <a:ext uri="{FF2B5EF4-FFF2-40B4-BE49-F238E27FC236}">
+                <a16:creationId xmlns:a16="http://schemas.microsoft.com/office/drawing/2014/main" id="{9BF3CF3B-81CF-2EC5-DE7E-3A21029563DA}"/>
               </a:ext>
             </a:extLst>
           </p:cNvPr>
@@ -9105,7 +9198,7 @@
           <p:nvPr/>
         </p:nvPicPr>
         <p:blipFill>
-          <a:blip r:embed="rId2">
+          <a:blip r:embed="rId3">
             <a:extLst>
               <a:ext uri="{28A0092B-C50C-407E-A947-70E740481C1C}">
                 <a14:useLocalDpi xmlns:a14="http://schemas.microsoft.com/office/drawing/2010/main" val="0"/>
@@ -9118,292 +9211,7 @@
         </p:blipFill>
         <p:spPr>
           <a:xfrm>
-            <a:off x="1197910" y="2499717"/>
-            <a:ext cx="1220228" cy="3337979"/>
-          </a:xfrm>
-          <a:prstGeom prst="rect">
-            <a:avLst/>
-          </a:prstGeom>
-        </p:spPr>
-      </p:pic>
-      <p:pic>
-        <p:nvPicPr>
-          <p:cNvPr id="10" name="Picture 9">
-            <a:extLst>
-              <a:ext uri="{FF2B5EF4-FFF2-40B4-BE49-F238E27FC236}">
-                <a16:creationId xmlns:a16="http://schemas.microsoft.com/office/drawing/2014/main" id="{7DB933BA-E1BB-9205-7AA8-241F5D7E8B6B}"/>
-              </a:ext>
-            </a:extLst>
-          </p:cNvPr>
-          <p:cNvPicPr>
-            <a:picLocks noChangeAspect="1"/>
-          </p:cNvPicPr>
-          <p:nvPr/>
-        </p:nvPicPr>
-        <p:blipFill>
-          <a:blip r:embed="rId3">
-            <a:extLst>
-              <a:ext uri="{28A0092B-C50C-407E-A947-70E740481C1C}">
-                <a14:useLocalDpi xmlns:a14="http://schemas.microsoft.com/office/drawing/2010/main" val="0"/>
-              </a:ext>
-            </a:extLst>
-          </a:blip>
-          <a:stretch>
-            <a:fillRect/>
-          </a:stretch>
-        </p:blipFill>
-        <p:spPr>
-          <a:xfrm>
-            <a:off x="5731235" y="2305518"/>
-            <a:ext cx="1419225" cy="3724275"/>
-          </a:xfrm>
-          <a:prstGeom prst="rect">
-            <a:avLst/>
-          </a:prstGeom>
-        </p:spPr>
-      </p:pic>
-      <p:sp>
-        <p:nvSpPr>
-          <p:cNvPr id="15" name="TextBox 14">
-            <a:extLst>
-              <a:ext uri="{FF2B5EF4-FFF2-40B4-BE49-F238E27FC236}">
-                <a16:creationId xmlns:a16="http://schemas.microsoft.com/office/drawing/2014/main" id="{31D08563-146C-DD64-52E9-E756B497C2FD}"/>
-              </a:ext>
-            </a:extLst>
-          </p:cNvPr>
-          <p:cNvSpPr txBox="1"/>
-          <p:nvPr/>
-        </p:nvSpPr>
-        <p:spPr>
-          <a:xfrm>
-            <a:off x="1028433" y="1343818"/>
-            <a:ext cx="1710981" cy="923330"/>
-          </a:xfrm>
-          <a:prstGeom prst="rect">
-            <a:avLst/>
-          </a:prstGeom>
-          <a:noFill/>
-        </p:spPr>
-        <p:txBody>
-          <a:bodyPr wrap="none" rtlCol="0">
-            <a:spAutoFit/>
-          </a:bodyPr>
-          <a:lstStyle/>
-          <a:p>
-            <a:r>
-              <a:rPr lang="ru-RU" dirty="0">
-                <a:latin typeface="Times New Roman" panose="02020603050405020304" pitchFamily="18" charset="0"/>
-                <a:cs typeface="Times New Roman" panose="02020603050405020304" pitchFamily="18" charset="0"/>
-              </a:rPr>
-              <a:t>Слой сверки и </a:t>
-            </a:r>
-          </a:p>
-          <a:p>
-            <a:r>
-              <a:rPr lang="ru-RU" dirty="0">
-                <a:latin typeface="Times New Roman" panose="02020603050405020304" pitchFamily="18" charset="0"/>
-                <a:cs typeface="Times New Roman" panose="02020603050405020304" pitchFamily="18" charset="0"/>
-              </a:rPr>
-              <a:t>уменьшения </a:t>
-            </a:r>
-          </a:p>
-          <a:p>
-            <a:r>
-              <a:rPr lang="ru-RU" dirty="0">
-                <a:latin typeface="Times New Roman" panose="02020603050405020304" pitchFamily="18" charset="0"/>
-                <a:cs typeface="Times New Roman" panose="02020603050405020304" pitchFamily="18" charset="0"/>
-              </a:rPr>
-              <a:t>размерности</a:t>
-            </a:r>
-            <a:endParaRPr lang="en-US" dirty="0">
-              <a:latin typeface="Times New Roman" panose="02020603050405020304" pitchFamily="18" charset="0"/>
-              <a:cs typeface="Times New Roman" panose="02020603050405020304" pitchFamily="18" charset="0"/>
-            </a:endParaRPr>
-          </a:p>
-        </p:txBody>
-      </p:sp>
-      <p:sp>
-        <p:nvSpPr>
-          <p:cNvPr id="16" name="TextBox 15">
-            <a:extLst>
-              <a:ext uri="{FF2B5EF4-FFF2-40B4-BE49-F238E27FC236}">
-                <a16:creationId xmlns:a16="http://schemas.microsoft.com/office/drawing/2014/main" id="{5536D870-FA42-BBFC-E877-BD76BD9766F3}"/>
-              </a:ext>
-            </a:extLst>
-          </p:cNvPr>
-          <p:cNvSpPr txBox="1"/>
-          <p:nvPr/>
-        </p:nvSpPr>
-        <p:spPr>
-          <a:xfrm>
-            <a:off x="3272186" y="1343818"/>
-            <a:ext cx="1710981" cy="923330"/>
-          </a:xfrm>
-          <a:prstGeom prst="rect">
-            <a:avLst/>
-          </a:prstGeom>
-          <a:noFill/>
-        </p:spPr>
-        <p:txBody>
-          <a:bodyPr wrap="none" rtlCol="0">
-            <a:spAutoFit/>
-          </a:bodyPr>
-          <a:lstStyle/>
-          <a:p>
-            <a:r>
-              <a:rPr lang="ru-RU" dirty="0">
-                <a:latin typeface="Times New Roman" panose="02020603050405020304" pitchFamily="18" charset="0"/>
-                <a:cs typeface="Times New Roman" panose="02020603050405020304" pitchFamily="18" charset="0"/>
-              </a:rPr>
-              <a:t>Слой сверки и </a:t>
-            </a:r>
-          </a:p>
-          <a:p>
-            <a:r>
-              <a:rPr lang="ru-RU" dirty="0">
-                <a:latin typeface="Times New Roman" panose="02020603050405020304" pitchFamily="18" charset="0"/>
-                <a:cs typeface="Times New Roman" panose="02020603050405020304" pitchFamily="18" charset="0"/>
-              </a:rPr>
-              <a:t>увеличения </a:t>
-            </a:r>
-          </a:p>
-          <a:p>
-            <a:r>
-              <a:rPr lang="ru-RU" dirty="0">
-                <a:latin typeface="Times New Roman" panose="02020603050405020304" pitchFamily="18" charset="0"/>
-                <a:cs typeface="Times New Roman" panose="02020603050405020304" pitchFamily="18" charset="0"/>
-              </a:rPr>
-              <a:t>размерности</a:t>
-            </a:r>
-            <a:endParaRPr lang="en-US" dirty="0">
-              <a:latin typeface="Times New Roman" panose="02020603050405020304" pitchFamily="18" charset="0"/>
-              <a:cs typeface="Times New Roman" panose="02020603050405020304" pitchFamily="18" charset="0"/>
-            </a:endParaRPr>
-          </a:p>
-        </p:txBody>
-      </p:sp>
-      <p:sp>
-        <p:nvSpPr>
-          <p:cNvPr id="17" name="TextBox 16">
-            <a:extLst>
-              <a:ext uri="{FF2B5EF4-FFF2-40B4-BE49-F238E27FC236}">
-                <a16:creationId xmlns:a16="http://schemas.microsoft.com/office/drawing/2014/main" id="{1439F920-A855-3B49-F266-A6D989117B40}"/>
-              </a:ext>
-            </a:extLst>
-          </p:cNvPr>
-          <p:cNvSpPr txBox="1"/>
-          <p:nvPr/>
-        </p:nvSpPr>
-        <p:spPr>
-          <a:xfrm>
-            <a:off x="5530711" y="1342768"/>
-            <a:ext cx="1827552" cy="646331"/>
-          </a:xfrm>
-          <a:prstGeom prst="rect">
-            <a:avLst/>
-          </a:prstGeom>
-          <a:noFill/>
-        </p:spPr>
-        <p:txBody>
-          <a:bodyPr wrap="none" rtlCol="0">
-            <a:spAutoFit/>
-          </a:bodyPr>
-          <a:lstStyle/>
-          <a:p>
-            <a:r>
-              <a:rPr lang="ru-RU" dirty="0">
-                <a:latin typeface="Times New Roman" panose="02020603050405020304" pitchFamily="18" charset="0"/>
-                <a:cs typeface="Times New Roman" panose="02020603050405020304" pitchFamily="18" charset="0"/>
-              </a:rPr>
-              <a:t>Слой адаптации </a:t>
-            </a:r>
-          </a:p>
-          <a:p>
-            <a:r>
-              <a:rPr lang="ru-RU" dirty="0">
-                <a:latin typeface="Times New Roman" panose="02020603050405020304" pitchFamily="18" charset="0"/>
-                <a:cs typeface="Times New Roman" panose="02020603050405020304" pitchFamily="18" charset="0"/>
-              </a:rPr>
-              <a:t>признаков</a:t>
-            </a:r>
-            <a:endParaRPr lang="en-US" dirty="0">
-              <a:latin typeface="Times New Roman" panose="02020603050405020304" pitchFamily="18" charset="0"/>
-              <a:cs typeface="Times New Roman" panose="02020603050405020304" pitchFamily="18" charset="0"/>
-            </a:endParaRPr>
-          </a:p>
-        </p:txBody>
-      </p:sp>
-      <p:sp>
-        <p:nvSpPr>
-          <p:cNvPr id="18" name="TextBox 17">
-            <a:extLst>
-              <a:ext uri="{FF2B5EF4-FFF2-40B4-BE49-F238E27FC236}">
-                <a16:creationId xmlns:a16="http://schemas.microsoft.com/office/drawing/2014/main" id="{B3D933DA-81A9-2E96-2613-F8DC26E353BC}"/>
-              </a:ext>
-            </a:extLst>
-          </p:cNvPr>
-          <p:cNvSpPr txBox="1"/>
-          <p:nvPr/>
-        </p:nvSpPr>
-        <p:spPr>
-          <a:xfrm>
-            <a:off x="8610600" y="1313077"/>
-            <a:ext cx="1705916" cy="369332"/>
-          </a:xfrm>
-          <a:prstGeom prst="rect">
-            <a:avLst/>
-          </a:prstGeom>
-          <a:noFill/>
-        </p:spPr>
-        <p:txBody>
-          <a:bodyPr wrap="none" rtlCol="0">
-            <a:spAutoFit/>
-          </a:bodyPr>
-          <a:lstStyle/>
-          <a:p>
-            <a:r>
-              <a:rPr lang="ru-RU" dirty="0">
-                <a:latin typeface="Times New Roman" panose="02020603050405020304" pitchFamily="18" charset="0"/>
-                <a:cs typeface="Times New Roman" panose="02020603050405020304" pitchFamily="18" charset="0"/>
-              </a:rPr>
-              <a:t>Слой внимания</a:t>
-            </a:r>
-            <a:endParaRPr lang="en-US" dirty="0">
-              <a:latin typeface="Times New Roman" panose="02020603050405020304" pitchFamily="18" charset="0"/>
-              <a:cs typeface="Times New Roman" panose="02020603050405020304" pitchFamily="18" charset="0"/>
-            </a:endParaRPr>
-          </a:p>
-        </p:txBody>
-      </p:sp>
-      <p:pic>
-        <p:nvPicPr>
-          <p:cNvPr id="20" name="Picture 19">
-            <a:extLst>
-              <a:ext uri="{FF2B5EF4-FFF2-40B4-BE49-F238E27FC236}">
-                <a16:creationId xmlns:a16="http://schemas.microsoft.com/office/drawing/2014/main" id="{9BF3CF3B-81CF-2EC5-DE7E-3A21029563DA}"/>
-              </a:ext>
-            </a:extLst>
-          </p:cNvPr>
-          <p:cNvPicPr>
-            <a:picLocks noChangeAspect="1"/>
-          </p:cNvPicPr>
-          <p:nvPr/>
-        </p:nvPicPr>
-        <p:blipFill>
-          <a:blip r:embed="rId4">
-            <a:extLst>
-              <a:ext uri="{28A0092B-C50C-407E-A947-70E740481C1C}">
-                <a14:useLocalDpi xmlns:a14="http://schemas.microsoft.com/office/drawing/2010/main" val="0"/>
-              </a:ext>
-            </a:extLst>
-          </a:blip>
-          <a:stretch>
-            <a:fillRect/>
-          </a:stretch>
-        </p:blipFill>
-        <p:spPr>
-          <a:xfrm>
-            <a:off x="8041481" y="1990149"/>
+            <a:off x="6031449" y="1899532"/>
             <a:ext cx="2808043" cy="4365151"/>
           </a:xfrm>
           <a:prstGeom prst="rect">

--- a/presentation.pptx
+++ b/presentation.pptx
@@ -6671,7 +6671,7 @@
                 <a:latin typeface="Times New Roman" panose="02020603050405020304" pitchFamily="18" charset="0"/>
                 <a:cs typeface="Times New Roman" panose="02020603050405020304" pitchFamily="18" charset="0"/>
               </a:rPr>
-              <a:t>фрагмента на изображении ;</a:t>
+              <a:t>фрагмента на изображении;</a:t>
             </a:r>
           </a:p>
           <a:p>

--- a/presentation.pptx
+++ b/presentation.pptx
@@ -212,7 +212,7 @@
           <a:p>
             <a:fld id="{9CF9DDCD-6582-4FC2-87A2-FA2F2F89B44A}" type="datetimeFigureOut">
               <a:rPr lang="ru-RU" smtClean="0"/>
-              <a:t>15.06.2026</a:t>
+              <a:t>23.06.2026</a:t>
             </a:fld>
             <a:endParaRPr lang="ru-RU"/>
           </a:p>
@@ -710,7 +710,7 @@
           <a:p>
             <a:fld id="{E2D3E6BD-B4C5-4C5E-AC73-5E733A3CDA2C}" type="datetime1">
               <a:rPr lang="ru-RU" smtClean="0"/>
-              <a:t>15.06.2026</a:t>
+              <a:t>23.06.2026</a:t>
             </a:fld>
             <a:endParaRPr lang="ru-RU"/>
           </a:p>
@@ -908,7 +908,7 @@
           <a:p>
             <a:fld id="{D7D4D24D-E8DE-46D2-B2EA-B77A9C5FF877}" type="datetime1">
               <a:rPr lang="ru-RU" smtClean="0"/>
-              <a:t>15.06.2026</a:t>
+              <a:t>23.06.2026</a:t>
             </a:fld>
             <a:endParaRPr lang="ru-RU"/>
           </a:p>
@@ -1116,7 +1116,7 @@
           <a:p>
             <a:fld id="{67B76F11-00B9-4E07-B295-6CA67D2F7E8B}" type="datetime1">
               <a:rPr lang="ru-RU" smtClean="0"/>
-              <a:t>15.06.2026</a:t>
+              <a:t>23.06.2026</a:t>
             </a:fld>
             <a:endParaRPr lang="ru-RU"/>
           </a:p>
@@ -1314,7 +1314,7 @@
           <a:p>
             <a:fld id="{63954F16-EF89-444B-B5EE-096ABF5F48C7}" type="datetime1">
               <a:rPr lang="ru-RU" smtClean="0"/>
-              <a:t>15.06.2026</a:t>
+              <a:t>23.06.2026</a:t>
             </a:fld>
             <a:endParaRPr lang="ru-RU"/>
           </a:p>
@@ -1589,7 +1589,7 @@
           <a:p>
             <a:fld id="{26E6D5F6-1A3B-4480-A930-7B5D513F4301}" type="datetime1">
               <a:rPr lang="ru-RU" smtClean="0"/>
-              <a:t>15.06.2026</a:t>
+              <a:t>23.06.2026</a:t>
             </a:fld>
             <a:endParaRPr lang="ru-RU"/>
           </a:p>
@@ -1854,7 +1854,7 @@
           <a:p>
             <a:fld id="{C0461997-42E7-4A3D-AFD9-A4B06E9A2CD4}" type="datetime1">
               <a:rPr lang="ru-RU" smtClean="0"/>
-              <a:t>15.06.2026</a:t>
+              <a:t>23.06.2026</a:t>
             </a:fld>
             <a:endParaRPr lang="ru-RU"/>
           </a:p>
@@ -2266,7 +2266,7 @@
           <a:p>
             <a:fld id="{00D1E04C-46DC-49F7-BB58-C0F68A028918}" type="datetime1">
               <a:rPr lang="ru-RU" smtClean="0"/>
-              <a:t>15.06.2026</a:t>
+              <a:t>23.06.2026</a:t>
             </a:fld>
             <a:endParaRPr lang="ru-RU"/>
           </a:p>
@@ -2407,7 +2407,7 @@
           <a:p>
             <a:fld id="{42BDAAF7-7DCA-4B59-8EFF-412AF87020B2}" type="datetime1">
               <a:rPr lang="ru-RU" smtClean="0"/>
-              <a:t>15.06.2026</a:t>
+              <a:t>23.06.2026</a:t>
             </a:fld>
             <a:endParaRPr lang="ru-RU"/>
           </a:p>
@@ -2520,7 +2520,7 @@
           <a:p>
             <a:fld id="{09C9192A-75AA-4314-85F0-C37E684E0F1B}" type="datetime1">
               <a:rPr lang="ru-RU" smtClean="0"/>
-              <a:t>15.06.2026</a:t>
+              <a:t>23.06.2026</a:t>
             </a:fld>
             <a:endParaRPr lang="ru-RU"/>
           </a:p>
@@ -2831,7 +2831,7 @@
           <a:p>
             <a:fld id="{1EA6CD73-1DC1-4CCB-8639-48CA902A4BE7}" type="datetime1">
               <a:rPr lang="ru-RU" smtClean="0"/>
-              <a:t>15.06.2026</a:t>
+              <a:t>23.06.2026</a:t>
             </a:fld>
             <a:endParaRPr lang="ru-RU"/>
           </a:p>
@@ -3119,7 +3119,7 @@
           <a:p>
             <a:fld id="{25FEEA16-318D-49A8-B19A-6FCF07807A8C}" type="datetime1">
               <a:rPr lang="ru-RU" smtClean="0"/>
-              <a:t>15.06.2026</a:t>
+              <a:t>23.06.2026</a:t>
             </a:fld>
             <a:endParaRPr lang="ru-RU"/>
           </a:p>
@@ -3360,7 +3360,7 @@
           <a:p>
             <a:fld id="{29DA6B07-345E-41F3-AB13-E427DFAF8E87}" type="datetime1">
               <a:rPr lang="ru-RU" smtClean="0"/>
-              <a:t>15.06.2026</a:t>
+              <a:t>23.06.2026</a:t>
             </a:fld>
             <a:endParaRPr lang="ru-RU"/>
           </a:p>
@@ -3921,7 +3921,7 @@
         </p:nvSpPr>
         <p:spPr>
           <a:xfrm>
-            <a:off x="1413130" y="325135"/>
+            <a:off x="1084052" y="316897"/>
             <a:ext cx="10023895" cy="1077218"/>
           </a:xfrm>
           <a:prstGeom prst="rect">
@@ -4033,61 +4033,6 @@
           </a:p>
         </p:txBody>
       </p:sp>
-      <p:pic>
-        <p:nvPicPr>
-          <p:cNvPr id="1026" name="Picture 2">
-            <a:extLst>
-              <a:ext uri="{FF2B5EF4-FFF2-40B4-BE49-F238E27FC236}">
-                <a16:creationId xmlns:a16="http://schemas.microsoft.com/office/drawing/2014/main" id="{D5C784ED-4674-0BC5-E267-DEAD8B26F35E}"/>
-              </a:ext>
-            </a:extLst>
-          </p:cNvPr>
-          <p:cNvPicPr>
-            <a:picLocks noChangeAspect="1" noChangeArrowheads="1"/>
-          </p:cNvPicPr>
-          <p:nvPr/>
-        </p:nvPicPr>
-        <p:blipFill>
-          <a:blip r:embed="rId2">
-            <a:extLst>
-              <a:ext uri="{28A0092B-C50C-407E-A947-70E740481C1C}">
-                <a14:useLocalDpi xmlns:a14="http://schemas.microsoft.com/office/drawing/2010/main" val="0"/>
-              </a:ext>
-            </a:extLst>
-          </a:blip>
-          <a:srcRect l="-96" t="-84" r="-96" b="-84"/>
-          <a:stretch>
-            <a:fillRect/>
-          </a:stretch>
-        </p:blipFill>
-        <p:spPr bwMode="auto">
-          <a:xfrm>
-            <a:off x="921559" y="294162"/>
-            <a:ext cx="983142" cy="1111100"/>
-          </a:xfrm>
-          <a:prstGeom prst="rect">
-            <a:avLst/>
-          </a:prstGeom>
-          <a:solidFill>
-            <a:srgbClr val="FFFFFF"/>
-          </a:solidFill>
-          <a:ln>
-            <a:noFill/>
-          </a:ln>
-          <a:extLst>
-            <a:ext uri="{91240B29-F687-4F45-9708-019B960494DF}">
-              <a14:hiddenLine xmlns:a14="http://schemas.microsoft.com/office/drawing/2010/main" w="9525">
-                <a:solidFill>
-                  <a:srgbClr val="000000"/>
-                </a:solidFill>
-                <a:miter lim="800000"/>
-                <a:headEnd/>
-                <a:tailEnd/>
-              </a14:hiddenLine>
-            </a:ext>
-          </a:extLst>
-        </p:spPr>
-      </p:pic>
       <p:sp>
         <p:nvSpPr>
           <p:cNvPr id="5" name="Номер слайда 4">
@@ -4531,41 +4476,6 @@
           </a:p>
         </p:txBody>
       </p:sp>
-      <p:pic>
-        <p:nvPicPr>
-          <p:cNvPr id="7" name="Content Placeholder 6">
-            <a:extLst>
-              <a:ext uri="{FF2B5EF4-FFF2-40B4-BE49-F238E27FC236}">
-                <a16:creationId xmlns:a16="http://schemas.microsoft.com/office/drawing/2014/main" id="{ABBCCDCD-DA7A-966C-FD07-175C84063773}"/>
-              </a:ext>
-            </a:extLst>
-          </p:cNvPr>
-          <p:cNvPicPr>
-            <a:picLocks noGrp="1" noChangeAspect="1"/>
-          </p:cNvPicPr>
-          <p:nvPr>
-            <p:ph idx="1"/>
-          </p:nvPr>
-        </p:nvPicPr>
-        <p:blipFill>
-          <a:blip r:embed="rId2">
-            <a:extLst>
-              <a:ext uri="{28A0092B-C50C-407E-A947-70E740481C1C}">
-                <a14:useLocalDpi xmlns:a14="http://schemas.microsoft.com/office/drawing/2010/main" val="0"/>
-              </a:ext>
-            </a:extLst>
-          </a:blip>
-          <a:stretch>
-            <a:fillRect/>
-          </a:stretch>
-        </p:blipFill>
-        <p:spPr>
-          <a:xfrm>
-            <a:off x="1012224" y="2417698"/>
-            <a:ext cx="4038600" cy="2771775"/>
-          </a:xfrm>
-        </p:spPr>
-      </p:pic>
       <p:sp>
         <p:nvSpPr>
           <p:cNvPr id="10" name="TextBox 9">
@@ -4713,6 +4623,14 @@
               </a:rPr>
               <a:t>Загрузка изображений и вывод результатов</a:t>
             </a:r>
+            <a:r>
+              <a:rPr lang="ru-RU" altLang="zh-CN" dirty="0">
+                <a:latin typeface="Times New Roman" panose="02020603050405020304" charset="0"/>
+                <a:ea typeface="Segoe WPC"/>
+                <a:cs typeface="Times New Roman" panose="02020603050405020304" charset="0"/>
+              </a:rPr>
+              <a:t>.</a:t>
+            </a:r>
             <a:endParaRPr lang="ru-RU" altLang="zh-CN" b="1" dirty="0">
               <a:latin typeface="Times New Roman" panose="02020603050405020304" charset="0"/>
               <a:ea typeface="Segoe WPC"/>
@@ -4744,7 +4662,7 @@
                 <a:ea typeface="Segoe WPC"/>
                 <a:cs typeface="Times New Roman" panose="02020603050405020304" charset="0"/>
               </a:rPr>
-              <a:t>Изменение размера и нормализация изображения</a:t>
+              <a:t>Изменение размера и нормализация изображения.</a:t>
             </a:r>
             <a:endParaRPr lang="ru-RU" altLang="zh-CN" sz="1800" i="0" dirty="0">
               <a:latin typeface="Times New Roman" panose="02020603050405020304" charset="0"/>
@@ -4754,6 +4672,41 @@
           </a:p>
         </p:txBody>
       </p:sp>
+      <p:pic>
+        <p:nvPicPr>
+          <p:cNvPr id="15" name="Content Placeholder 14">
+            <a:extLst>
+              <a:ext uri="{FF2B5EF4-FFF2-40B4-BE49-F238E27FC236}">
+                <a16:creationId xmlns:a16="http://schemas.microsoft.com/office/drawing/2014/main" id="{A0010E8D-AF84-E291-2533-C0719E123781}"/>
+              </a:ext>
+            </a:extLst>
+          </p:cNvPr>
+          <p:cNvPicPr>
+            <a:picLocks noGrp="1" noChangeAspect="1"/>
+          </p:cNvPicPr>
+          <p:nvPr>
+            <p:ph idx="1"/>
+          </p:nvPr>
+        </p:nvPicPr>
+        <p:blipFill>
+          <a:blip r:embed="rId2">
+            <a:extLst>
+              <a:ext uri="{28A0092B-C50C-407E-A947-70E740481C1C}">
+                <a14:useLocalDpi xmlns:a14="http://schemas.microsoft.com/office/drawing/2010/main" val="0"/>
+              </a:ext>
+            </a:extLst>
+          </a:blip>
+          <a:stretch>
+            <a:fillRect/>
+          </a:stretch>
+        </p:blipFill>
+        <p:spPr>
+          <a:xfrm>
+            <a:off x="838200" y="2043112"/>
+            <a:ext cx="4038600" cy="2771775"/>
+          </a:xfrm>
+        </p:spPr>
+      </p:pic>
     </p:spTree>
     <p:extLst>
       <p:ext uri="{BB962C8B-B14F-4D97-AF65-F5344CB8AC3E}">
@@ -4902,11 +4855,18 @@
                   <a:buChar char="-"/>
                 </a:pPr>
                 <a:r>
+                  <a:rPr lang="ru-RU" dirty="0">
+                    <a:latin typeface="Times New Roman" panose="02020603050405020304" pitchFamily="18" charset="0"/>
+                    <a:cs typeface="Times New Roman" panose="02020603050405020304" pitchFamily="18" charset="0"/>
+                  </a:rPr>
+                  <a:t>Индекс Жаккара</a:t>
+                </a:r>
+                <a:r>
                   <a:rPr lang="vi-VN" dirty="0">
                     <a:latin typeface="Times New Roman" panose="02020603050405020304" pitchFamily="18" charset="0"/>
                     <a:cs typeface="Times New Roman" panose="02020603050405020304" pitchFamily="18" charset="0"/>
                   </a:rPr>
-                  <a:t>IoU:</a:t>
+                  <a:t> (IoU):</a:t>
                 </a:r>
               </a:p>
               <a:p>
@@ -5886,19 +5846,17 @@
       </p:sp>
       <p:pic>
         <p:nvPicPr>
-          <p:cNvPr id="7" name="Content Placeholder 6">
-            <a:extLst>
-              <a:ext uri="{FF2B5EF4-FFF2-40B4-BE49-F238E27FC236}">
-                <a16:creationId xmlns:a16="http://schemas.microsoft.com/office/drawing/2014/main" id="{430866B0-30A9-F0EB-6FE3-2434E2C1F26F}"/>
+          <p:cNvPr id="11" name="Picture 10">
+            <a:extLst>
+              <a:ext uri="{FF2B5EF4-FFF2-40B4-BE49-F238E27FC236}">
+                <a16:creationId xmlns:a16="http://schemas.microsoft.com/office/drawing/2014/main" id="{0C2BA9E5-B0A4-C3B1-E131-D335E4292278}"/>
               </a:ext>
             </a:extLst>
           </p:cNvPr>
           <p:cNvPicPr>
-            <a:picLocks noGrp="1" noChangeAspect="1"/>
+            <a:picLocks noChangeAspect="1"/>
           </p:cNvPicPr>
-          <p:nvPr>
-            <p:ph idx="1"/>
-          </p:nvPr>
+          <p:nvPr/>
         </p:nvPicPr>
         <p:blipFill>
           <a:blip r:embed="rId2">
@@ -5914,24 +5872,29 @@
         </p:blipFill>
         <p:spPr>
           <a:xfrm>
-            <a:off x="5728669" y="2430162"/>
-            <a:ext cx="6256476" cy="3514342"/>
+            <a:off x="467497" y="2380734"/>
+            <a:ext cx="4658076" cy="2800869"/>
           </a:xfrm>
+          <a:prstGeom prst="rect">
+            <a:avLst/>
+          </a:prstGeom>
         </p:spPr>
       </p:pic>
       <p:pic>
         <p:nvPicPr>
-          <p:cNvPr id="11" name="Picture 10">
-            <a:extLst>
-              <a:ext uri="{FF2B5EF4-FFF2-40B4-BE49-F238E27FC236}">
-                <a16:creationId xmlns:a16="http://schemas.microsoft.com/office/drawing/2014/main" id="{0C2BA9E5-B0A4-C3B1-E131-D335E4292278}"/>
+          <p:cNvPr id="17" name="Content Placeholder 16">
+            <a:extLst>
+              <a:ext uri="{FF2B5EF4-FFF2-40B4-BE49-F238E27FC236}">
+                <a16:creationId xmlns:a16="http://schemas.microsoft.com/office/drawing/2014/main" id="{5F57C34F-77C5-391A-EF69-579E6DF1336D}"/>
               </a:ext>
             </a:extLst>
           </p:cNvPr>
           <p:cNvPicPr>
-            <a:picLocks noChangeAspect="1"/>
+            <a:picLocks noGrp="1" noChangeAspect="1"/>
           </p:cNvPicPr>
-          <p:nvPr/>
+          <p:nvPr>
+            <p:ph idx="1"/>
+          </p:nvPr>
         </p:nvPicPr>
         <p:blipFill>
           <a:blip r:embed="rId3">
@@ -5947,12 +5910,9 @@
         </p:blipFill>
         <p:spPr>
           <a:xfrm>
-            <a:off x="467497" y="2792626"/>
-            <a:ext cx="4973174" cy="2990335"/>
+            <a:off x="5463622" y="1986027"/>
+            <a:ext cx="6260881" cy="3590282"/>
           </a:xfrm>
-          <a:prstGeom prst="rect">
-            <a:avLst/>
-          </a:prstGeom>
         </p:spPr>
       </p:pic>
     </p:spTree>
@@ -6078,11 +6038,73 @@
         </p:blipFill>
         <p:spPr>
           <a:xfrm>
-            <a:off x="1697847" y="1825625"/>
-            <a:ext cx="8796305" cy="4351338"/>
+            <a:off x="2113431" y="1458911"/>
+            <a:ext cx="7965137" cy="3940178"/>
           </a:xfrm>
         </p:spPr>
       </p:pic>
+      <p:sp>
+        <p:nvSpPr>
+          <p:cNvPr id="4" name="TextBox 3">
+            <a:extLst>
+              <a:ext uri="{FF2B5EF4-FFF2-40B4-BE49-F238E27FC236}">
+                <a16:creationId xmlns:a16="http://schemas.microsoft.com/office/drawing/2014/main" id="{1874FA25-6DDE-20E8-B41E-241D557490AD}"/>
+              </a:ext>
+            </a:extLst>
+          </p:cNvPr>
+          <p:cNvSpPr txBox="1"/>
+          <p:nvPr/>
+        </p:nvSpPr>
+        <p:spPr>
+          <a:xfrm>
+            <a:off x="1005016" y="5554554"/>
+            <a:ext cx="7828746" cy="646331"/>
+          </a:xfrm>
+          <a:prstGeom prst="rect">
+            <a:avLst/>
+          </a:prstGeom>
+          <a:noFill/>
+        </p:spPr>
+        <p:txBody>
+          <a:bodyPr wrap="none" rtlCol="0">
+            <a:spAutoFit/>
+          </a:bodyPr>
+          <a:lstStyle/>
+          <a:p>
+            <a:r>
+              <a:rPr lang="ru-RU" dirty="0">
+                <a:latin typeface="Times New Roman" panose="02020603050405020304" pitchFamily="18" charset="0"/>
+                <a:cs typeface="Times New Roman" panose="02020603050405020304" pitchFamily="18" charset="0"/>
+              </a:rPr>
+              <a:t>При сильном сжатии (JPEG = 80) модель сохраняет приемлемую точность</a:t>
+            </a:r>
+            <a:r>
+              <a:rPr lang="en-US" dirty="0">
+                <a:latin typeface="Times New Roman" panose="02020603050405020304" pitchFamily="18" charset="0"/>
+                <a:cs typeface="Times New Roman" panose="02020603050405020304" pitchFamily="18" charset="0"/>
+              </a:rPr>
+              <a:t>.</a:t>
+            </a:r>
+            <a:r>
+              <a:rPr lang="ru-RU" dirty="0">
+                <a:latin typeface="Times New Roman" panose="02020603050405020304" pitchFamily="18" charset="0"/>
+                <a:cs typeface="Times New Roman" panose="02020603050405020304" pitchFamily="18" charset="0"/>
+              </a:rPr>
+              <a:t> </a:t>
+            </a:r>
+            <a:br>
+              <a:rPr lang="ru-RU" dirty="0">
+                <a:latin typeface="Times New Roman" panose="02020603050405020304" pitchFamily="18" charset="0"/>
+                <a:cs typeface="Times New Roman" panose="02020603050405020304" pitchFamily="18" charset="0"/>
+              </a:rPr>
+            </a:br>
+            <a:endParaRPr lang="en-US" dirty="0">
+              <a:latin typeface="Times New Roman" panose="02020603050405020304" pitchFamily="18" charset="0"/>
+              <a:cs typeface="Times New Roman" panose="02020603050405020304" pitchFamily="18" charset="0"/>
+            </a:endParaRPr>
+          </a:p>
+        </p:txBody>
+      </p:sp>
     </p:spTree>
     <p:extLst>
       <p:ext uri="{BB962C8B-B14F-4D97-AF65-F5344CB8AC3E}">
@@ -6186,7 +6208,21 @@
                 <a:latin typeface="Times New Roman" panose="02020603050405020304" pitchFamily="18" charset="0"/>
                 <a:cs typeface="Times New Roman" panose="02020603050405020304" pitchFamily="18" charset="0"/>
               </a:rPr>
-              <a:t>Разработан и реализован метод обнаружения фальсифицированного фрагмента на изображении с использованием сверточной нейронной сети.</a:t>
+              <a:t>Цель достигнута</a:t>
+            </a:r>
+            <a:r>
+              <a:rPr lang="vi-VN" sz="2400" dirty="0">
+                <a:latin typeface="Times New Roman" panose="02020603050405020304" pitchFamily="18" charset="0"/>
+                <a:cs typeface="Times New Roman" panose="02020603050405020304" pitchFamily="18" charset="0"/>
+              </a:rPr>
+              <a:t>: </a:t>
+            </a:r>
+            <a:r>
+              <a:rPr lang="ru-RU" sz="2400" dirty="0">
+                <a:latin typeface="Times New Roman" panose="02020603050405020304" pitchFamily="18" charset="0"/>
+                <a:cs typeface="Times New Roman" panose="02020603050405020304" pitchFamily="18" charset="0"/>
+              </a:rPr>
+              <a:t>разработан и реализован метод обнаружения фальсифицированного фрагмента на изображении с использованием сверточной нейронной сети.</a:t>
             </a:r>
             <a:endParaRPr lang="ru-RU" sz="800" dirty="0">
               <a:latin typeface="Times New Roman" panose="02020603050405020304" pitchFamily="18" charset="0"/>
@@ -6202,53 +6238,118 @@
                 <a:latin typeface="Times New Roman" panose="02020603050405020304" pitchFamily="18" charset="0"/>
                 <a:cs typeface="Times New Roman" panose="02020603050405020304" pitchFamily="18" charset="0"/>
               </a:rPr>
-              <a:t>Все задачи решены. Цель достигнута.</a:t>
+              <a:t>Все задачи решены:</a:t>
+            </a:r>
+          </a:p>
+          <a:p>
+            <a:pPr>
+              <a:buFontTx/>
+              <a:buChar char="-"/>
+            </a:pPr>
+            <a:r>
+              <a:rPr lang="ru-RU" sz="2400" dirty="0">
+                <a:latin typeface="Times New Roman" panose="02020603050405020304" pitchFamily="18" charset="0"/>
+                <a:cs typeface="Times New Roman" panose="02020603050405020304" pitchFamily="18" charset="0"/>
+              </a:rPr>
+              <a:t>приведен сравнительный анализ методов</a:t>
+            </a:r>
+            <a:r>
+              <a:rPr lang="en-US" sz="2400" dirty="0">
+                <a:latin typeface="Times New Roman" panose="02020603050405020304" pitchFamily="18" charset="0"/>
+                <a:cs typeface="Times New Roman" panose="02020603050405020304" pitchFamily="18" charset="0"/>
+              </a:rPr>
+              <a:t> </a:t>
+            </a:r>
+            <a:r>
+              <a:rPr lang="ru-RU" sz="2400" dirty="0">
+                <a:latin typeface="Times New Roman" panose="02020603050405020304" pitchFamily="18" charset="0"/>
+                <a:cs typeface="Times New Roman" panose="02020603050405020304" pitchFamily="18" charset="0"/>
+              </a:rPr>
+              <a:t>обнаружения</a:t>
+            </a:r>
+            <a:r>
+              <a:rPr lang="en-US" sz="2400" dirty="0">
+                <a:latin typeface="Times New Roman" panose="02020603050405020304" pitchFamily="18" charset="0"/>
+                <a:cs typeface="Times New Roman" panose="02020603050405020304" pitchFamily="18" charset="0"/>
+              </a:rPr>
+              <a:t> </a:t>
+            </a:r>
+            <a:r>
+              <a:rPr lang="ru-RU" sz="2400" dirty="0">
+                <a:latin typeface="Times New Roman" panose="02020603050405020304" pitchFamily="18" charset="0"/>
+                <a:cs typeface="Times New Roman" panose="02020603050405020304" pitchFamily="18" charset="0"/>
+              </a:rPr>
+              <a:t>фальсифицированного</a:t>
+            </a:r>
+            <a:r>
+              <a:rPr lang="en-US" sz="2400" dirty="0">
+                <a:latin typeface="Times New Roman" panose="02020603050405020304" pitchFamily="18" charset="0"/>
+                <a:cs typeface="Times New Roman" panose="02020603050405020304" pitchFamily="18" charset="0"/>
+              </a:rPr>
+              <a:t> </a:t>
+            </a:r>
+            <a:r>
+              <a:rPr lang="ru-RU" sz="2400" dirty="0">
+                <a:latin typeface="Times New Roman" panose="02020603050405020304" pitchFamily="18" charset="0"/>
+                <a:cs typeface="Times New Roman" panose="02020603050405020304" pitchFamily="18" charset="0"/>
+              </a:rPr>
+              <a:t>фрагмента на изображении;</a:t>
+            </a:r>
+          </a:p>
+          <a:p>
+            <a:pPr>
+              <a:buFontTx/>
+              <a:buChar char="-"/>
+            </a:pPr>
+            <a:r>
+              <a:rPr lang="ru-RU" sz="2400" dirty="0">
+                <a:latin typeface="Times New Roman" panose="02020603050405020304" pitchFamily="18" charset="0"/>
+                <a:cs typeface="Times New Roman" panose="02020603050405020304" pitchFamily="18" charset="0"/>
+              </a:rPr>
+              <a:t>разработал метод обнаружения фальсифицированного фрагмента на изображении с использованием сверточной нейронной сети;</a:t>
+            </a:r>
+          </a:p>
+          <a:p>
+            <a:pPr>
+              <a:buFontTx/>
+              <a:buChar char="-"/>
+            </a:pPr>
+            <a:r>
+              <a:rPr lang="ru-RU" sz="2400" dirty="0">
+                <a:latin typeface="Times New Roman" panose="02020603050405020304" pitchFamily="18" charset="0"/>
+                <a:cs typeface="Times New Roman" panose="02020603050405020304" pitchFamily="18" charset="0"/>
+              </a:rPr>
+              <a:t>разработал программное обеспечение, реализующее данный метод;</a:t>
+            </a:r>
+          </a:p>
+          <a:p>
+            <a:pPr>
+              <a:buFontTx/>
+              <a:buChar char="-"/>
+            </a:pPr>
+            <a:r>
+              <a:rPr lang="ru-RU" sz="2400">
+                <a:latin typeface="Times New Roman" panose="02020603050405020304" pitchFamily="18" charset="0"/>
+                <a:cs typeface="Times New Roman" panose="02020603050405020304" pitchFamily="18" charset="0"/>
+              </a:rPr>
+              <a:t>приведены исследования </a:t>
+            </a:r>
+            <a:r>
+              <a:rPr lang="ru-RU" sz="2400" dirty="0">
+                <a:latin typeface="Times New Roman" panose="02020603050405020304" pitchFamily="18" charset="0"/>
+                <a:cs typeface="Times New Roman" panose="02020603050405020304" pitchFamily="18" charset="0"/>
+              </a:rPr>
+              <a:t>эффективности реализованного метода.</a:t>
             </a:r>
           </a:p>
           <a:p>
             <a:pPr marL="0" indent="0">
               <a:buNone/>
             </a:pPr>
-            <a:endParaRPr lang="ru-RU" sz="800" dirty="0">
+            <a:endParaRPr lang="ru-RU" sz="2400" dirty="0">
               <a:latin typeface="Times New Roman" panose="02020603050405020304" pitchFamily="18" charset="0"/>
               <a:cs typeface="Times New Roman" panose="02020603050405020304" pitchFamily="18" charset="0"/>
             </a:endParaRPr>
-          </a:p>
-          <a:p>
-            <a:pPr marL="0" indent="0">
-              <a:buNone/>
-            </a:pPr>
-            <a:r>
-              <a:rPr lang="ru-RU" sz="2400" dirty="0">
-                <a:latin typeface="Times New Roman" panose="02020603050405020304" pitchFamily="18" charset="0"/>
-                <a:cs typeface="Times New Roman" panose="02020603050405020304" pitchFamily="18" charset="0"/>
-              </a:rPr>
-              <a:t>Дальнейшее развитие:</a:t>
-            </a:r>
-          </a:p>
-          <a:p>
-            <a:pPr marL="0" indent="0">
-              <a:buNone/>
-            </a:pPr>
-            <a:r>
-              <a:rPr lang="ru-RU" sz="2400" dirty="0">
-                <a:latin typeface="Times New Roman" panose="02020603050405020304" pitchFamily="18" charset="0"/>
-                <a:cs typeface="Times New Roman" panose="02020603050405020304" pitchFamily="18" charset="0"/>
-              </a:rPr>
-              <a:t>- Оптимизация для работы в реальном времени.</a:t>
-            </a:r>
-          </a:p>
-          <a:p>
-            <a:pPr marL="0" indent="0">
-              <a:buNone/>
-            </a:pPr>
-            <a:r>
-              <a:rPr lang="ru-RU" sz="2400" dirty="0">
-                <a:latin typeface="Times New Roman" panose="02020603050405020304" pitchFamily="18" charset="0"/>
-                <a:cs typeface="Times New Roman" panose="02020603050405020304" pitchFamily="18" charset="0"/>
-              </a:rPr>
-              <a:t>- Устойчивость к видам постобработки.</a:t>
-            </a:r>
           </a:p>
         </p:txBody>
       </p:sp>
@@ -8784,7 +8885,21 @@
                 <a:latin typeface="Times New Roman" panose="02020603050405020304" pitchFamily="18" charset="0"/>
                 <a:cs typeface="Times New Roman" panose="02020603050405020304" pitchFamily="18" charset="0"/>
               </a:rPr>
-              <a:t>Алгоритм усиливает различия между оригинальным и пережатым изображением, что позволяет выявлять следы фальсификации.</a:t>
+              <a:t>Алгоритм усиливает различия между оригинальным и </a:t>
+            </a:r>
+            <a:r>
+              <a:rPr lang="en-US" dirty="0">
+                <a:latin typeface="Times New Roman" panose="02020603050405020304" pitchFamily="18" charset="0"/>
+                <a:cs typeface="Times New Roman" panose="02020603050405020304" pitchFamily="18" charset="0"/>
+              </a:rPr>
+              <a:t>c</a:t>
+            </a:r>
+            <a:r>
+              <a:rPr lang="ru-RU" dirty="0">
+                <a:latin typeface="Times New Roman" panose="02020603050405020304" pitchFamily="18" charset="0"/>
+                <a:cs typeface="Times New Roman" panose="02020603050405020304" pitchFamily="18" charset="0"/>
+              </a:rPr>
+              <a:t>жатым с другим коэффициентов изображением, что позволяет выявлять следы фальсификации.</a:t>
             </a:r>
             <a:endParaRPr lang="en-US" dirty="0">
               <a:latin typeface="Times New Roman" panose="02020603050405020304" pitchFamily="18" charset="0"/>
@@ -8798,7 +8913,7 @@
           <p:cNvPr id="7" name="Content Placeholder 6">
             <a:extLst>
               <a:ext uri="{FF2B5EF4-FFF2-40B4-BE49-F238E27FC236}">
-                <a16:creationId xmlns:a16="http://schemas.microsoft.com/office/drawing/2014/main" id="{24E75607-6ACE-BA33-965E-7172469A03C8}"/>
+                <a16:creationId xmlns:a16="http://schemas.microsoft.com/office/drawing/2014/main" id="{2EDAC775-1BE0-96E7-5CE7-2979B868EFF8}"/>
               </a:ext>
             </a:extLst>
           </p:cNvPr>
@@ -8823,8 +8938,8 @@
         </p:blipFill>
         <p:spPr>
           <a:xfrm>
-            <a:off x="8224071" y="856145"/>
-            <a:ext cx="1758129" cy="5500205"/>
+            <a:off x="8610600" y="806492"/>
+            <a:ext cx="1598851" cy="5549858"/>
           </a:xfrm>
         </p:spPr>
       </p:pic>
@@ -9054,42 +9169,6 @@
           </a:p>
         </p:txBody>
       </p:sp>
-      <p:pic>
-        <p:nvPicPr>
-          <p:cNvPr id="10" name="Picture 9">
-            <a:extLst>
-              <a:ext uri="{FF2B5EF4-FFF2-40B4-BE49-F238E27FC236}">
-                <a16:creationId xmlns:a16="http://schemas.microsoft.com/office/drawing/2014/main" id="{7DB933BA-E1BB-9205-7AA8-241F5D7E8B6B}"/>
-              </a:ext>
-            </a:extLst>
-          </p:cNvPr>
-          <p:cNvPicPr>
-            <a:picLocks noChangeAspect="1"/>
-          </p:cNvPicPr>
-          <p:nvPr/>
-        </p:nvPicPr>
-        <p:blipFill>
-          <a:blip r:embed="rId2">
-            <a:extLst>
-              <a:ext uri="{28A0092B-C50C-407E-A947-70E740481C1C}">
-                <a14:useLocalDpi xmlns:a14="http://schemas.microsoft.com/office/drawing/2010/main" val="0"/>
-              </a:ext>
-            </a:extLst>
-          </a:blip>
-          <a:stretch>
-            <a:fillRect/>
-          </a:stretch>
-        </p:blipFill>
-        <p:spPr>
-          <a:xfrm>
-            <a:off x="2076008" y="2306568"/>
-            <a:ext cx="1419225" cy="3724275"/>
-          </a:xfrm>
-          <a:prstGeom prst="rect">
-            <a:avLst/>
-          </a:prstGeom>
-        </p:spPr>
-      </p:pic>
       <p:sp>
         <p:nvSpPr>
           <p:cNvPr id="17" name="TextBox 16">
@@ -9185,10 +9264,46 @@
       </p:sp>
       <p:pic>
         <p:nvPicPr>
-          <p:cNvPr id="20" name="Picture 19">
-            <a:extLst>
-              <a:ext uri="{FF2B5EF4-FFF2-40B4-BE49-F238E27FC236}">
-                <a16:creationId xmlns:a16="http://schemas.microsoft.com/office/drawing/2014/main" id="{9BF3CF3B-81CF-2EC5-DE7E-3A21029563DA}"/>
+          <p:cNvPr id="5" name="Picture 4">
+            <a:extLst>
+              <a:ext uri="{FF2B5EF4-FFF2-40B4-BE49-F238E27FC236}">
+                <a16:creationId xmlns:a16="http://schemas.microsoft.com/office/drawing/2014/main" id="{D834AE24-F70E-6743-C422-B807E644CC15}"/>
+              </a:ext>
+            </a:extLst>
+          </p:cNvPr>
+          <p:cNvPicPr>
+            <a:picLocks noChangeAspect="1"/>
+          </p:cNvPicPr>
+          <p:nvPr/>
+        </p:nvPicPr>
+        <p:blipFill>
+          <a:blip r:embed="rId2">
+            <a:extLst>
+              <a:ext uri="{28A0092B-C50C-407E-A947-70E740481C1C}">
+                <a14:useLocalDpi xmlns:a14="http://schemas.microsoft.com/office/drawing/2010/main" val="0"/>
+              </a:ext>
+            </a:extLst>
+          </a:blip>
+          <a:stretch>
+            <a:fillRect/>
+          </a:stretch>
+        </p:blipFill>
+        <p:spPr>
+          <a:xfrm>
+            <a:off x="2079647" y="2269372"/>
+            <a:ext cx="1419225" cy="3724275"/>
+          </a:xfrm>
+          <a:prstGeom prst="rect">
+            <a:avLst/>
+          </a:prstGeom>
+        </p:spPr>
+      </p:pic>
+      <p:pic>
+        <p:nvPicPr>
+          <p:cNvPr id="7" name="Picture 6">
+            <a:extLst>
+              <a:ext uri="{FF2B5EF4-FFF2-40B4-BE49-F238E27FC236}">
+                <a16:creationId xmlns:a16="http://schemas.microsoft.com/office/drawing/2014/main" id="{0725CE36-EC15-56F0-1397-E7D537E1D126}"/>
               </a:ext>
             </a:extLst>
           </p:cNvPr>
@@ -9211,8 +9326,8 @@
         </p:blipFill>
         <p:spPr>
           <a:xfrm>
-            <a:off x="6031449" y="1899532"/>
-            <a:ext cx="2808043" cy="4365151"/>
+            <a:off x="6096000" y="1848216"/>
+            <a:ext cx="2472121" cy="4243423"/>
           </a:xfrm>
           <a:prstGeom prst="rect">
             <a:avLst/>

--- a/presentation.pptx
+++ b/presentation.pptx
@@ -126,6 +126,9 @@
     <p:ext uri="{EFAFB233-063F-42B5-8137-9DF3F51BA10A}">
       <p15:sldGuideLst xmlns:p15="http://schemas.microsoft.com/office/powerpoint/2012/main"/>
     </p:ext>
+    <p:ext uri="{2D200454-40CA-4A62-9FC3-DE9A4176ACB9}">
+      <p15:notesGuideLst xmlns:p15="http://schemas.microsoft.com/office/powerpoint/2012/main"/>
+    </p:ext>
   </p:extLst>
 </p:presentation>
 </file>
@@ -212,7 +215,7 @@
           <a:p>
             <a:fld id="{9CF9DDCD-6582-4FC2-87A2-FA2F2F89B44A}" type="datetimeFigureOut">
               <a:rPr lang="ru-RU" smtClean="0"/>
-              <a:t>23.06.2026</a:t>
+              <a:t>24.06.2026</a:t>
             </a:fld>
             <a:endParaRPr lang="ru-RU"/>
           </a:p>
@@ -498,6 +501,346 @@
       </p:grpSpPr>
       <p:sp>
         <p:nvSpPr>
+          <p:cNvPr id="2" name="Slide Image Placeholder 1"/>
+          <p:cNvSpPr>
+            <a:spLocks noGrp="1" noRot="1" noChangeAspect="1"/>
+          </p:cNvSpPr>
+          <p:nvPr>
+            <p:ph type="sldImg"/>
+          </p:nvPr>
+        </p:nvSpPr>
+        <p:spPr/>
+      </p:sp>
+      <p:sp>
+        <p:nvSpPr>
+          <p:cNvPr id="3" name="Notes Placeholder 2"/>
+          <p:cNvSpPr>
+            <a:spLocks noGrp="1"/>
+          </p:cNvSpPr>
+          <p:nvPr>
+            <p:ph type="body" idx="1"/>
+          </p:nvPr>
+        </p:nvSpPr>
+        <p:spPr/>
+        <p:txBody>
+          <a:bodyPr/>
+          <a:lstStyle/>
+          <a:p>
+            <a:pPr marL="0" marR="0" lvl="0" indent="0" algn="l" defTabSz="914400" rtl="0" eaLnBrk="1" fontAlgn="auto" latinLnBrk="0" hangingPunct="1">
+              <a:lnSpc>
+                <a:spcPct val="100000"/>
+              </a:lnSpc>
+              <a:spcBef>
+                <a:spcPts val="0"/>
+              </a:spcBef>
+              <a:spcAft>
+                <a:spcPts val="0"/>
+              </a:spcAft>
+              <a:buClrTx/>
+              <a:buSzTx/>
+              <a:buFontTx/>
+              <a:buNone/>
+              <a:tabLst/>
+              <a:defRPr/>
+            </a:pPr>
+            <a:r>
+              <a:rPr lang="ru-RU" sz="1200" kern="1200" dirty="0">
+                <a:solidFill>
+                  <a:schemeClr val="tx1"/>
+                </a:solidFill>
+                <a:effectLst/>
+                <a:latin typeface="+mn-lt"/>
+                <a:ea typeface="+mn-ea"/>
+                <a:cs typeface="+mn-cs"/>
+              </a:rPr>
+              <a:t>Здравствуйте, уважаемая комиссия. Вашему вниманию представляется выпускная квалификационная работа на тему «Метод обнаружения фальсифицированного фрагмента на изображении с использованием свёрточной нейронной сети».</a:t>
+            </a:r>
+            <a:endParaRPr lang="en-US" sz="1200" kern="1200" dirty="0">
+              <a:solidFill>
+                <a:schemeClr val="tx1"/>
+              </a:solidFill>
+              <a:effectLst/>
+              <a:latin typeface="+mn-lt"/>
+              <a:ea typeface="+mn-ea"/>
+              <a:cs typeface="+mn-cs"/>
+            </a:endParaRPr>
+          </a:p>
+          <a:p>
+            <a:endParaRPr lang="en-US" dirty="0"/>
+          </a:p>
+        </p:txBody>
+      </p:sp>
+      <p:sp>
+        <p:nvSpPr>
+          <p:cNvPr id="4" name="Slide Number Placeholder 3"/>
+          <p:cNvSpPr>
+            <a:spLocks noGrp="1"/>
+          </p:cNvSpPr>
+          <p:nvPr>
+            <p:ph type="sldNum" sz="quarter" idx="5"/>
+          </p:nvPr>
+        </p:nvSpPr>
+        <p:spPr/>
+        <p:txBody>
+          <a:bodyPr/>
+          <a:lstStyle/>
+          <a:p>
+            <a:fld id="{7B721744-D43C-422F-B42D-F891E80211BA}" type="slidenum">
+              <a:rPr lang="ru-RU" smtClean="0"/>
+              <a:t>1</a:t>
+            </a:fld>
+            <a:endParaRPr lang="ru-RU"/>
+          </a:p>
+        </p:txBody>
+      </p:sp>
+    </p:spTree>
+    <p:extLst>
+      <p:ext uri="{BB962C8B-B14F-4D97-AF65-F5344CB8AC3E}">
+        <p14:creationId xmlns:p14="http://schemas.microsoft.com/office/powerpoint/2010/main" val="1987354168"/>
+      </p:ext>
+    </p:extLst>
+  </p:cSld>
+  <p:clrMapOvr>
+    <a:masterClrMapping/>
+  </p:clrMapOvr>
+</p:notes>
+</file>
+
+<file path=ppt/notesSlides/notesSlide10.xml><?xml version="1.0" encoding="utf-8"?>
+<p:notes xmlns:a="http://schemas.openxmlformats.org/drawingml/2006/main" xmlns:r="http://schemas.openxmlformats.org/officeDocument/2006/relationships" xmlns:p="http://schemas.openxmlformats.org/presentationml/2006/main">
+  <p:cSld>
+    <p:spTree>
+      <p:nvGrpSpPr>
+        <p:cNvPr id="1" name=""/>
+        <p:cNvGrpSpPr/>
+        <p:nvPr/>
+      </p:nvGrpSpPr>
+      <p:grpSpPr>
+        <a:xfrm>
+          <a:off x="0" y="0"/>
+          <a:ext cx="0" cy="0"/>
+          <a:chOff x="0" y="0"/>
+          <a:chExt cx="0" cy="0"/>
+        </a:xfrm>
+      </p:grpSpPr>
+      <p:sp>
+        <p:nvSpPr>
+          <p:cNvPr id="2" name="Slide Image Placeholder 1"/>
+          <p:cNvSpPr>
+            <a:spLocks noGrp="1" noRot="1" noChangeAspect="1"/>
+          </p:cNvSpPr>
+          <p:nvPr>
+            <p:ph type="sldImg"/>
+          </p:nvPr>
+        </p:nvSpPr>
+        <p:spPr/>
+      </p:sp>
+      <p:sp>
+        <p:nvSpPr>
+          <p:cNvPr id="3" name="Notes Placeholder 2"/>
+          <p:cNvSpPr>
+            <a:spLocks noGrp="1"/>
+          </p:cNvSpPr>
+          <p:nvPr>
+            <p:ph type="body" idx="1"/>
+          </p:nvPr>
+        </p:nvSpPr>
+        <p:spPr/>
+        <p:txBody>
+          <a:bodyPr/>
+          <a:lstStyle/>
+          <a:p>
+            <a:pPr marL="0" marR="0" lvl="0" indent="0" algn="l" defTabSz="914400" rtl="0" eaLnBrk="1" fontAlgn="auto" latinLnBrk="0" hangingPunct="1">
+              <a:lnSpc>
+                <a:spcPct val="100000"/>
+              </a:lnSpc>
+              <a:spcBef>
+                <a:spcPts val="0"/>
+              </a:spcBef>
+              <a:spcAft>
+                <a:spcPts val="0"/>
+              </a:spcAft>
+              <a:buClrTx/>
+              <a:buSzTx/>
+              <a:buFontTx/>
+              <a:buNone/>
+              <a:tabLst/>
+              <a:defRPr/>
+            </a:pPr>
+            <a:r>
+              <a:rPr lang="ru-RU" sz="1200" kern="1200" dirty="0">
+                <a:solidFill>
+                  <a:schemeClr val="tx1"/>
+                </a:solidFill>
+                <a:effectLst/>
+                <a:latin typeface="+mn-lt"/>
+                <a:ea typeface="+mn-ea"/>
+                <a:cs typeface="+mn-cs"/>
+              </a:rPr>
+              <a:t>Для обучения и тестирования использовался  набор данных CASIA второго версии, который содержит более 5000 изображений с пиксельными масками.</a:t>
+            </a:r>
+            <a:endParaRPr lang="en-US" sz="1200" kern="1200" dirty="0">
+              <a:solidFill>
+                <a:schemeClr val="tx1"/>
+              </a:solidFill>
+              <a:effectLst/>
+              <a:latin typeface="+mn-lt"/>
+              <a:ea typeface="+mn-ea"/>
+              <a:cs typeface="+mn-cs"/>
+            </a:endParaRPr>
+          </a:p>
+          <a:p>
+            <a:endParaRPr lang="en-US" dirty="0"/>
+          </a:p>
+        </p:txBody>
+      </p:sp>
+      <p:sp>
+        <p:nvSpPr>
+          <p:cNvPr id="4" name="Slide Number Placeholder 3"/>
+          <p:cNvSpPr>
+            <a:spLocks noGrp="1"/>
+          </p:cNvSpPr>
+          <p:nvPr>
+            <p:ph type="sldNum" sz="quarter" idx="5"/>
+          </p:nvPr>
+        </p:nvSpPr>
+        <p:spPr/>
+        <p:txBody>
+          <a:bodyPr/>
+          <a:lstStyle/>
+          <a:p>
+            <a:fld id="{7B721744-D43C-422F-B42D-F891E80211BA}" type="slidenum">
+              <a:rPr lang="ru-RU" smtClean="0"/>
+              <a:t>10</a:t>
+            </a:fld>
+            <a:endParaRPr lang="ru-RU"/>
+          </a:p>
+        </p:txBody>
+      </p:sp>
+    </p:spTree>
+    <p:extLst>
+      <p:ext uri="{BB962C8B-B14F-4D97-AF65-F5344CB8AC3E}">
+        <p14:creationId xmlns:p14="http://schemas.microsoft.com/office/powerpoint/2010/main" val="1005936451"/>
+      </p:ext>
+    </p:extLst>
+  </p:cSld>
+  <p:clrMapOvr>
+    <a:masterClrMapping/>
+  </p:clrMapOvr>
+</p:notes>
+</file>
+
+<file path=ppt/notesSlides/notesSlide11.xml><?xml version="1.0" encoding="utf-8"?>
+<p:notes xmlns:a="http://schemas.openxmlformats.org/drawingml/2006/main" xmlns:r="http://schemas.openxmlformats.org/officeDocument/2006/relationships" xmlns:p="http://schemas.openxmlformats.org/presentationml/2006/main">
+  <p:cSld>
+    <p:spTree>
+      <p:nvGrpSpPr>
+        <p:cNvPr id="1" name=""/>
+        <p:cNvGrpSpPr/>
+        <p:nvPr/>
+      </p:nvGrpSpPr>
+      <p:grpSpPr>
+        <a:xfrm>
+          <a:off x="0" y="0"/>
+          <a:ext cx="0" cy="0"/>
+          <a:chOff x="0" y="0"/>
+          <a:chExt cx="0" cy="0"/>
+        </a:xfrm>
+      </p:grpSpPr>
+      <p:sp>
+        <p:nvSpPr>
+          <p:cNvPr id="2" name="Slide Image Placeholder 1"/>
+          <p:cNvSpPr>
+            <a:spLocks noGrp="1" noRot="1" noChangeAspect="1"/>
+          </p:cNvSpPr>
+          <p:nvPr>
+            <p:ph type="sldImg"/>
+          </p:nvPr>
+        </p:nvSpPr>
+        <p:spPr/>
+      </p:sp>
+      <p:sp>
+        <p:nvSpPr>
+          <p:cNvPr id="3" name="Notes Placeholder 2"/>
+          <p:cNvSpPr>
+            <a:spLocks noGrp="1"/>
+          </p:cNvSpPr>
+          <p:nvPr>
+            <p:ph type="body" idx="1"/>
+          </p:nvPr>
+        </p:nvSpPr>
+        <p:spPr/>
+        <p:txBody>
+          <a:bodyPr/>
+          <a:lstStyle/>
+          <a:p>
+            <a:r>
+              <a:rPr lang="ru-RU" dirty="0">
+                <a:effectLst/>
+              </a:rPr>
+              <a:t>На одинадцадтом слайде представлена схема разработанного программного обеспечения. Программа имеет модульную структуру и включает четыре модуля: модуль пользовательского интерфейса, позволяющий загружать изображения и выводить результаты обнаружения; модуль предобработки изображения, выполняющий изменение размера и нормализацию; а также модули обнаружения фальсифицированного фрагмента, сохранения и загрузки модели. Такая архитектура обеспечивает удобство использования и чёткое разделение responsibilities между компонентами системы.</a:t>
+            </a:r>
+          </a:p>
+          <a:p>
+            <a:endParaRPr lang="en-US" dirty="0"/>
+          </a:p>
+        </p:txBody>
+      </p:sp>
+      <p:sp>
+        <p:nvSpPr>
+          <p:cNvPr id="4" name="Slide Number Placeholder 3"/>
+          <p:cNvSpPr>
+            <a:spLocks noGrp="1"/>
+          </p:cNvSpPr>
+          <p:nvPr>
+            <p:ph type="sldNum" sz="quarter" idx="5"/>
+          </p:nvPr>
+        </p:nvSpPr>
+        <p:spPr/>
+        <p:txBody>
+          <a:bodyPr/>
+          <a:lstStyle/>
+          <a:p>
+            <a:fld id="{7B721744-D43C-422F-B42D-F891E80211BA}" type="slidenum">
+              <a:rPr lang="ru-RU" smtClean="0"/>
+              <a:t>11</a:t>
+            </a:fld>
+            <a:endParaRPr lang="ru-RU"/>
+          </a:p>
+        </p:txBody>
+      </p:sp>
+    </p:spTree>
+    <p:extLst>
+      <p:ext uri="{BB962C8B-B14F-4D97-AF65-F5344CB8AC3E}">
+        <p14:creationId xmlns:p14="http://schemas.microsoft.com/office/powerpoint/2010/main" val="2296304804"/>
+      </p:ext>
+    </p:extLst>
+  </p:cSld>
+  <p:clrMapOvr>
+    <a:masterClrMapping/>
+  </p:clrMapOvr>
+</p:notes>
+</file>
+
+<file path=ppt/notesSlides/notesSlide12.xml><?xml version="1.0" encoding="utf-8"?>
+<p:notes xmlns:a="http://schemas.openxmlformats.org/drawingml/2006/main" xmlns:r="http://schemas.openxmlformats.org/officeDocument/2006/relationships" xmlns:p="http://schemas.openxmlformats.org/presentationml/2006/main">
+  <p:cSld>
+    <p:spTree>
+      <p:nvGrpSpPr>
+        <p:cNvPr id="1" name=""/>
+        <p:cNvGrpSpPr/>
+        <p:nvPr/>
+      </p:nvGrpSpPr>
+      <p:grpSpPr>
+        <a:xfrm>
+          <a:off x="0" y="0"/>
+          <a:ext cx="0" cy="0"/>
+          <a:chOff x="0" y="0"/>
+          <a:chExt cx="0" cy="0"/>
+        </a:xfrm>
+      </p:grpSpPr>
+      <p:sp>
+        <p:nvSpPr>
           <p:cNvPr id="2" name="Образ слайда 1"/>
           <p:cNvSpPr>
             <a:spLocks noGrp="1" noRot="1" noChangeAspect="1"/>
@@ -522,6 +865,82 @@
         <p:txBody>
           <a:bodyPr/>
           <a:lstStyle/>
+          <a:p>
+            <a:pPr marL="0" marR="0" lvl="0" indent="0" algn="l" defTabSz="914400" rtl="0" eaLnBrk="1" fontAlgn="auto" latinLnBrk="0" hangingPunct="1">
+              <a:lnSpc>
+                <a:spcPct val="100000"/>
+              </a:lnSpc>
+              <a:spcBef>
+                <a:spcPts val="0"/>
+              </a:spcBef>
+              <a:spcAft>
+                <a:spcPts val="0"/>
+              </a:spcAft>
+              <a:buClrTx/>
+              <a:buSzTx/>
+              <a:buFontTx/>
+              <a:buNone/>
+              <a:tabLst/>
+              <a:defRPr/>
+            </a:pPr>
+            <a:r>
+              <a:rPr lang="ru-RU" sz="1200" kern="1200" dirty="0">
+                <a:solidFill>
+                  <a:schemeClr val="tx1"/>
+                </a:solidFill>
+                <a:effectLst/>
+                <a:latin typeface="+mn-lt"/>
+                <a:ea typeface="+mn-ea"/>
+                <a:cs typeface="+mn-cs"/>
+              </a:rPr>
+              <a:t>Для оценки качество обнаружения метода используются две метрики: F1-мера и IoU</a:t>
+            </a:r>
+            <a:r>
+              <a:rPr lang="vi-VN" sz="1200" kern="1200" dirty="0">
+                <a:solidFill>
+                  <a:schemeClr val="tx1"/>
+                </a:solidFill>
+                <a:effectLst/>
+                <a:latin typeface="+mn-lt"/>
+                <a:ea typeface="+mn-ea"/>
+                <a:cs typeface="+mn-cs"/>
+              </a:rPr>
+              <a:t> (</a:t>
+            </a:r>
+            <a:r>
+              <a:rPr lang="ru-RU" sz="1200" b="1" kern="1200" dirty="0">
+                <a:solidFill>
+                  <a:schemeClr val="tx1"/>
+                </a:solidFill>
+                <a:effectLst/>
+                <a:latin typeface="+mn-lt"/>
+                <a:ea typeface="+mn-ea"/>
+                <a:cs typeface="+mn-cs"/>
+              </a:rPr>
+              <a:t>индекс Жаккара)</a:t>
+            </a:r>
+            <a:r>
+              <a:rPr lang="ru-RU" sz="1200" kern="1200" dirty="0">
+                <a:solidFill>
+                  <a:schemeClr val="tx1"/>
+                </a:solidFill>
+                <a:effectLst/>
+                <a:latin typeface="+mn-lt"/>
+                <a:ea typeface="+mn-ea"/>
+                <a:cs typeface="+mn-cs"/>
+              </a:rPr>
+              <a:t>. Эти метрики вычислены по формулам, показанным на слайде.</a:t>
+            </a:r>
+            <a:endParaRPr lang="en-US" sz="1200" kern="1200" dirty="0">
+              <a:solidFill>
+                <a:schemeClr val="tx1"/>
+              </a:solidFill>
+              <a:effectLst/>
+              <a:latin typeface="+mn-lt"/>
+              <a:ea typeface="+mn-ea"/>
+              <a:cs typeface="+mn-cs"/>
+            </a:endParaRPr>
+          </a:p>
           <a:p>
             <a:endParaRPr lang="ru-RU" dirty="0"/>
           </a:p>
@@ -554,6 +973,1726 @@
     <p:extLst>
       <p:ext uri="{BB962C8B-B14F-4D97-AF65-F5344CB8AC3E}">
         <p14:creationId xmlns:p14="http://schemas.microsoft.com/office/powerpoint/2010/main" val="3665800082"/>
+      </p:ext>
+    </p:extLst>
+  </p:cSld>
+  <p:clrMapOvr>
+    <a:masterClrMapping/>
+  </p:clrMapOvr>
+</p:notes>
+</file>
+
+<file path=ppt/notesSlides/notesSlide13.xml><?xml version="1.0" encoding="utf-8"?>
+<p:notes xmlns:a="http://schemas.openxmlformats.org/drawingml/2006/main" xmlns:r="http://schemas.openxmlformats.org/officeDocument/2006/relationships" xmlns:p="http://schemas.openxmlformats.org/presentationml/2006/main">
+  <p:cSld>
+    <p:spTree>
+      <p:nvGrpSpPr>
+        <p:cNvPr id="1" name=""/>
+        <p:cNvGrpSpPr/>
+        <p:nvPr/>
+      </p:nvGrpSpPr>
+      <p:grpSpPr>
+        <a:xfrm>
+          <a:off x="0" y="0"/>
+          <a:ext cx="0" cy="0"/>
+          <a:chOff x="0" y="0"/>
+          <a:chExt cx="0" cy="0"/>
+        </a:xfrm>
+      </p:grpSpPr>
+      <p:sp>
+        <p:nvSpPr>
+          <p:cNvPr id="2" name="Slide Image Placeholder 1"/>
+          <p:cNvSpPr>
+            <a:spLocks noGrp="1" noRot="1" noChangeAspect="1"/>
+          </p:cNvSpPr>
+          <p:nvPr>
+            <p:ph type="sldImg"/>
+          </p:nvPr>
+        </p:nvSpPr>
+        <p:spPr/>
+      </p:sp>
+      <p:sp>
+        <p:nvSpPr>
+          <p:cNvPr id="3" name="Notes Placeholder 2"/>
+          <p:cNvSpPr>
+            <a:spLocks noGrp="1"/>
+          </p:cNvSpPr>
+          <p:nvPr>
+            <p:ph type="body" idx="1"/>
+          </p:nvPr>
+        </p:nvSpPr>
+        <p:spPr/>
+        <p:txBody>
+          <a:bodyPr/>
+          <a:lstStyle/>
+          <a:p>
+            <a:pPr marL="0" marR="0" lvl="0" indent="0" algn="l" defTabSz="914400" rtl="0" eaLnBrk="1" fontAlgn="auto" latinLnBrk="0" hangingPunct="1">
+              <a:lnSpc>
+                <a:spcPct val="100000"/>
+              </a:lnSpc>
+              <a:spcBef>
+                <a:spcPts val="0"/>
+              </a:spcBef>
+              <a:spcAft>
+                <a:spcPts val="0"/>
+              </a:spcAft>
+              <a:buClrTx/>
+              <a:buSzTx/>
+              <a:buFontTx/>
+              <a:buNone/>
+              <a:tabLst/>
+              <a:defRPr/>
+            </a:pPr>
+            <a:r>
+              <a:rPr lang="ru-RU" sz="1200" kern="1200" dirty="0">
+                <a:solidFill>
+                  <a:schemeClr val="tx1"/>
+                </a:solidFill>
+                <a:effectLst/>
+                <a:latin typeface="+mn-lt"/>
+                <a:ea typeface="+mn-ea"/>
+                <a:cs typeface="+mn-cs"/>
+              </a:rPr>
+              <a:t>Слайд 13 демонстрирует влияние механизма внимания на работу метода. Добавление механизма внимания повышает качество работы метода. Визуально маска стала значительно точнее и чище.</a:t>
+            </a:r>
+            <a:endParaRPr lang="en-US" sz="1200" kern="1200" dirty="0">
+              <a:solidFill>
+                <a:schemeClr val="tx1"/>
+              </a:solidFill>
+              <a:effectLst/>
+              <a:latin typeface="+mn-lt"/>
+              <a:ea typeface="+mn-ea"/>
+              <a:cs typeface="+mn-cs"/>
+            </a:endParaRPr>
+          </a:p>
+          <a:p>
+            <a:endParaRPr lang="en-US" dirty="0"/>
+          </a:p>
+        </p:txBody>
+      </p:sp>
+      <p:sp>
+        <p:nvSpPr>
+          <p:cNvPr id="4" name="Slide Number Placeholder 3"/>
+          <p:cNvSpPr>
+            <a:spLocks noGrp="1"/>
+          </p:cNvSpPr>
+          <p:nvPr>
+            <p:ph type="sldNum" sz="quarter" idx="5"/>
+          </p:nvPr>
+        </p:nvSpPr>
+        <p:spPr/>
+        <p:txBody>
+          <a:bodyPr/>
+          <a:lstStyle/>
+          <a:p>
+            <a:fld id="{7B721744-D43C-422F-B42D-F891E80211BA}" type="slidenum">
+              <a:rPr lang="ru-RU" smtClean="0"/>
+              <a:t>13</a:t>
+            </a:fld>
+            <a:endParaRPr lang="ru-RU"/>
+          </a:p>
+        </p:txBody>
+      </p:sp>
+    </p:spTree>
+    <p:extLst>
+      <p:ext uri="{BB962C8B-B14F-4D97-AF65-F5344CB8AC3E}">
+        <p14:creationId xmlns:p14="http://schemas.microsoft.com/office/powerpoint/2010/main" val="1897652762"/>
+      </p:ext>
+    </p:extLst>
+  </p:cSld>
+  <p:clrMapOvr>
+    <a:masterClrMapping/>
+  </p:clrMapOvr>
+</p:notes>
+</file>
+
+<file path=ppt/notesSlides/notesSlide14.xml><?xml version="1.0" encoding="utf-8"?>
+<p:notes xmlns:a="http://schemas.openxmlformats.org/drawingml/2006/main" xmlns:r="http://schemas.openxmlformats.org/officeDocument/2006/relationships" xmlns:p="http://schemas.openxmlformats.org/presentationml/2006/main">
+  <p:cSld>
+    <p:spTree>
+      <p:nvGrpSpPr>
+        <p:cNvPr id="1" name=""/>
+        <p:cNvGrpSpPr/>
+        <p:nvPr/>
+      </p:nvGrpSpPr>
+      <p:grpSpPr>
+        <a:xfrm>
+          <a:off x="0" y="0"/>
+          <a:ext cx="0" cy="0"/>
+          <a:chOff x="0" y="0"/>
+          <a:chExt cx="0" cy="0"/>
+        </a:xfrm>
+      </p:grpSpPr>
+      <p:sp>
+        <p:nvSpPr>
+          <p:cNvPr id="2" name="Slide Image Placeholder 1"/>
+          <p:cNvSpPr>
+            <a:spLocks noGrp="1" noRot="1" noChangeAspect="1"/>
+          </p:cNvSpPr>
+          <p:nvPr>
+            <p:ph type="sldImg"/>
+          </p:nvPr>
+        </p:nvSpPr>
+        <p:spPr/>
+      </p:sp>
+      <p:sp>
+        <p:nvSpPr>
+          <p:cNvPr id="3" name="Notes Placeholder 2"/>
+          <p:cNvSpPr>
+            <a:spLocks noGrp="1"/>
+          </p:cNvSpPr>
+          <p:nvPr>
+            <p:ph type="body" idx="1"/>
+          </p:nvPr>
+        </p:nvSpPr>
+        <p:spPr/>
+        <p:txBody>
+          <a:bodyPr/>
+          <a:lstStyle/>
+          <a:p>
+            <a:pPr marL="0" marR="0" lvl="0" indent="0" algn="l" defTabSz="914400" rtl="0" eaLnBrk="1" fontAlgn="auto" latinLnBrk="0" hangingPunct="1">
+              <a:lnSpc>
+                <a:spcPct val="100000"/>
+              </a:lnSpc>
+              <a:spcBef>
+                <a:spcPts val="0"/>
+              </a:spcBef>
+              <a:spcAft>
+                <a:spcPts val="0"/>
+              </a:spcAft>
+              <a:buClrTx/>
+              <a:buSzTx/>
+              <a:buFontTx/>
+              <a:buNone/>
+              <a:tabLst/>
+              <a:defRPr/>
+            </a:pPr>
+            <a:r>
+              <a:rPr lang="ru-RU" sz="1400" kern="1200" dirty="0">
+                <a:solidFill>
+                  <a:schemeClr val="tx1"/>
+                </a:solidFill>
+                <a:effectLst/>
+                <a:latin typeface="+mn-lt"/>
+                <a:ea typeface="+mn-ea"/>
+                <a:cs typeface="+mn-cs"/>
+              </a:rPr>
+              <a:t>На четырнадцатом слайде показан вклад слоя адаптации признаков. Наилучшие результаты дают слои адаптации в виде остаточных блоков. Без адаптации качество падает на 20%, так как шумовые и семантические признаки не согласованы.</a:t>
+            </a:r>
+            <a:endParaRPr lang="en-US" sz="1400" kern="1200" dirty="0">
+              <a:solidFill>
+                <a:schemeClr val="tx1"/>
+              </a:solidFill>
+              <a:effectLst/>
+              <a:latin typeface="+mn-lt"/>
+              <a:ea typeface="+mn-ea"/>
+              <a:cs typeface="+mn-cs"/>
+            </a:endParaRPr>
+          </a:p>
+          <a:p>
+            <a:endParaRPr lang="en-US" sz="1400" dirty="0"/>
+          </a:p>
+        </p:txBody>
+      </p:sp>
+      <p:sp>
+        <p:nvSpPr>
+          <p:cNvPr id="4" name="Slide Number Placeholder 3"/>
+          <p:cNvSpPr>
+            <a:spLocks noGrp="1"/>
+          </p:cNvSpPr>
+          <p:nvPr>
+            <p:ph type="sldNum" sz="quarter" idx="5"/>
+          </p:nvPr>
+        </p:nvSpPr>
+        <p:spPr/>
+        <p:txBody>
+          <a:bodyPr/>
+          <a:lstStyle/>
+          <a:p>
+            <a:fld id="{7B721744-D43C-422F-B42D-F891E80211BA}" type="slidenum">
+              <a:rPr lang="ru-RU" smtClean="0"/>
+              <a:t>14</a:t>
+            </a:fld>
+            <a:endParaRPr lang="ru-RU"/>
+          </a:p>
+        </p:txBody>
+      </p:sp>
+    </p:spTree>
+    <p:extLst>
+      <p:ext uri="{BB962C8B-B14F-4D97-AF65-F5344CB8AC3E}">
+        <p14:creationId xmlns:p14="http://schemas.microsoft.com/office/powerpoint/2010/main" val="790562386"/>
+      </p:ext>
+    </p:extLst>
+  </p:cSld>
+  <p:clrMapOvr>
+    <a:masterClrMapping/>
+  </p:clrMapOvr>
+</p:notes>
+</file>
+
+<file path=ppt/notesSlides/notesSlide15.xml><?xml version="1.0" encoding="utf-8"?>
+<p:notes xmlns:a="http://schemas.openxmlformats.org/drawingml/2006/main" xmlns:r="http://schemas.openxmlformats.org/officeDocument/2006/relationships" xmlns:p="http://schemas.openxmlformats.org/presentationml/2006/main">
+  <p:cSld>
+    <p:spTree>
+      <p:nvGrpSpPr>
+        <p:cNvPr id="1" name=""/>
+        <p:cNvGrpSpPr/>
+        <p:nvPr/>
+      </p:nvGrpSpPr>
+      <p:grpSpPr>
+        <a:xfrm>
+          <a:off x="0" y="0"/>
+          <a:ext cx="0" cy="0"/>
+          <a:chOff x="0" y="0"/>
+          <a:chExt cx="0" cy="0"/>
+        </a:xfrm>
+      </p:grpSpPr>
+      <p:sp>
+        <p:nvSpPr>
+          <p:cNvPr id="2" name="Slide Image Placeholder 1"/>
+          <p:cNvSpPr>
+            <a:spLocks noGrp="1" noRot="1" noChangeAspect="1"/>
+          </p:cNvSpPr>
+          <p:nvPr>
+            <p:ph type="sldImg"/>
+          </p:nvPr>
+        </p:nvSpPr>
+        <p:spPr/>
+      </p:sp>
+      <p:sp>
+        <p:nvSpPr>
+          <p:cNvPr id="3" name="Notes Placeholder 2"/>
+          <p:cNvSpPr>
+            <a:spLocks noGrp="1"/>
+          </p:cNvSpPr>
+          <p:nvPr>
+            <p:ph type="body" idx="1"/>
+          </p:nvPr>
+        </p:nvSpPr>
+        <p:spPr/>
+        <p:txBody>
+          <a:bodyPr/>
+          <a:lstStyle/>
+          <a:p>
+            <a:r>
+              <a:rPr lang="ru-RU" sz="1200" kern="1200" dirty="0">
+                <a:solidFill>
+                  <a:schemeClr val="tx1"/>
+                </a:solidFill>
+                <a:effectLst/>
+                <a:latin typeface="+mn-lt"/>
+                <a:ea typeface="+mn-ea"/>
+                <a:cs typeface="+mn-cs"/>
+              </a:rPr>
+              <a:t>Следующее исследование – зависимость качества работы метода от уровня сжатия изображения. При качестве 80 % модель сохраняет приемлемую точность, что подтверждает практическую применимость метода.</a:t>
+            </a:r>
+            <a:endParaRPr lang="en-US" sz="1200" kern="1200" dirty="0">
+              <a:solidFill>
+                <a:schemeClr val="tx1"/>
+              </a:solidFill>
+              <a:effectLst/>
+              <a:latin typeface="+mn-lt"/>
+              <a:ea typeface="+mn-ea"/>
+              <a:cs typeface="+mn-cs"/>
+            </a:endParaRPr>
+          </a:p>
+        </p:txBody>
+      </p:sp>
+      <p:sp>
+        <p:nvSpPr>
+          <p:cNvPr id="4" name="Slide Number Placeholder 3"/>
+          <p:cNvSpPr>
+            <a:spLocks noGrp="1"/>
+          </p:cNvSpPr>
+          <p:nvPr>
+            <p:ph type="sldNum" sz="quarter" idx="5"/>
+          </p:nvPr>
+        </p:nvSpPr>
+        <p:spPr/>
+        <p:txBody>
+          <a:bodyPr/>
+          <a:lstStyle/>
+          <a:p>
+            <a:fld id="{7B721744-D43C-422F-B42D-F891E80211BA}" type="slidenum">
+              <a:rPr lang="ru-RU" smtClean="0"/>
+              <a:t>15</a:t>
+            </a:fld>
+            <a:endParaRPr lang="ru-RU"/>
+          </a:p>
+        </p:txBody>
+      </p:sp>
+    </p:spTree>
+    <p:extLst>
+      <p:ext uri="{BB962C8B-B14F-4D97-AF65-F5344CB8AC3E}">
+        <p14:creationId xmlns:p14="http://schemas.microsoft.com/office/powerpoint/2010/main" val="2727370032"/>
+      </p:ext>
+    </p:extLst>
+  </p:cSld>
+  <p:clrMapOvr>
+    <a:masterClrMapping/>
+  </p:clrMapOvr>
+</p:notes>
+</file>
+
+<file path=ppt/notesSlides/notesSlide16.xml><?xml version="1.0" encoding="utf-8"?>
+<p:notes xmlns:a="http://schemas.openxmlformats.org/drawingml/2006/main" xmlns:r="http://schemas.openxmlformats.org/officeDocument/2006/relationships" xmlns:p="http://schemas.openxmlformats.org/presentationml/2006/main">
+  <p:cSld>
+    <p:spTree>
+      <p:nvGrpSpPr>
+        <p:cNvPr id="1" name=""/>
+        <p:cNvGrpSpPr/>
+        <p:nvPr/>
+      </p:nvGrpSpPr>
+      <p:grpSpPr>
+        <a:xfrm>
+          <a:off x="0" y="0"/>
+          <a:ext cx="0" cy="0"/>
+          <a:chOff x="0" y="0"/>
+          <a:chExt cx="0" cy="0"/>
+        </a:xfrm>
+      </p:grpSpPr>
+      <p:sp>
+        <p:nvSpPr>
+          <p:cNvPr id="2" name="Slide Image Placeholder 1"/>
+          <p:cNvSpPr>
+            <a:spLocks noGrp="1" noRot="1" noChangeAspect="1"/>
+          </p:cNvSpPr>
+          <p:nvPr>
+            <p:ph type="sldImg"/>
+          </p:nvPr>
+        </p:nvSpPr>
+        <p:spPr/>
+      </p:sp>
+      <p:sp>
+        <p:nvSpPr>
+          <p:cNvPr id="3" name="Notes Placeholder 2"/>
+          <p:cNvSpPr>
+            <a:spLocks noGrp="1"/>
+          </p:cNvSpPr>
+          <p:nvPr>
+            <p:ph type="body" idx="1"/>
+          </p:nvPr>
+        </p:nvSpPr>
+        <p:spPr/>
+        <p:txBody>
+          <a:bodyPr/>
+          <a:lstStyle/>
+          <a:p>
+            <a:pPr marL="0" marR="0" lvl="0" indent="0" algn="l" defTabSz="914400" rtl="0" eaLnBrk="1" fontAlgn="auto" latinLnBrk="0" hangingPunct="1">
+              <a:lnSpc>
+                <a:spcPct val="100000"/>
+              </a:lnSpc>
+              <a:spcBef>
+                <a:spcPts val="0"/>
+              </a:spcBef>
+              <a:spcAft>
+                <a:spcPts val="0"/>
+              </a:spcAft>
+              <a:buClrTx/>
+              <a:buSzTx/>
+              <a:buFontTx/>
+              <a:buNone/>
+              <a:tabLst/>
+              <a:defRPr/>
+            </a:pPr>
+            <a:r>
+              <a:rPr lang="ru-RU" sz="1200" kern="1200" dirty="0">
+                <a:solidFill>
+                  <a:schemeClr val="tx1"/>
+                </a:solidFill>
+                <a:effectLst/>
+                <a:latin typeface="+mn-lt"/>
+                <a:ea typeface="+mn-ea"/>
+                <a:cs typeface="+mn-cs"/>
+              </a:rPr>
+              <a:t>В работе разработан и реализован двухпоточный метод обнаружения фальсифицированных фрагментов с механизмами внимания и адаптации признаков. Все поставленные задачи решены, цель достигнута. Направление дальнейшего развития можно рассмотреть ускорение для реального времени и повышение устойчивости к постобработке.</a:t>
+            </a:r>
+            <a:endParaRPr lang="en-US" sz="1200" kern="1200" dirty="0">
+              <a:solidFill>
+                <a:schemeClr val="tx1"/>
+              </a:solidFill>
+              <a:effectLst/>
+              <a:latin typeface="+mn-lt"/>
+              <a:ea typeface="+mn-ea"/>
+              <a:cs typeface="+mn-cs"/>
+            </a:endParaRPr>
+          </a:p>
+          <a:p>
+            <a:endParaRPr lang="en-US" dirty="0"/>
+          </a:p>
+        </p:txBody>
+      </p:sp>
+      <p:sp>
+        <p:nvSpPr>
+          <p:cNvPr id="4" name="Slide Number Placeholder 3"/>
+          <p:cNvSpPr>
+            <a:spLocks noGrp="1"/>
+          </p:cNvSpPr>
+          <p:nvPr>
+            <p:ph type="sldNum" sz="quarter" idx="5"/>
+          </p:nvPr>
+        </p:nvSpPr>
+        <p:spPr/>
+        <p:txBody>
+          <a:bodyPr/>
+          <a:lstStyle/>
+          <a:p>
+            <a:fld id="{7B721744-D43C-422F-B42D-F891E80211BA}" type="slidenum">
+              <a:rPr lang="ru-RU" smtClean="0"/>
+              <a:t>16</a:t>
+            </a:fld>
+            <a:endParaRPr lang="ru-RU"/>
+          </a:p>
+        </p:txBody>
+      </p:sp>
+    </p:spTree>
+    <p:extLst>
+      <p:ext uri="{BB962C8B-B14F-4D97-AF65-F5344CB8AC3E}">
+        <p14:creationId xmlns:p14="http://schemas.microsoft.com/office/powerpoint/2010/main" val="3212363420"/>
+      </p:ext>
+    </p:extLst>
+  </p:cSld>
+  <p:clrMapOvr>
+    <a:masterClrMapping/>
+  </p:clrMapOvr>
+</p:notes>
+</file>
+
+<file path=ppt/notesSlides/notesSlide2.xml><?xml version="1.0" encoding="utf-8"?>
+<p:notes xmlns:a="http://schemas.openxmlformats.org/drawingml/2006/main" xmlns:r="http://schemas.openxmlformats.org/officeDocument/2006/relationships" xmlns:p="http://schemas.openxmlformats.org/presentationml/2006/main">
+  <p:cSld>
+    <p:spTree>
+      <p:nvGrpSpPr>
+        <p:cNvPr id="1" name=""/>
+        <p:cNvGrpSpPr/>
+        <p:nvPr/>
+      </p:nvGrpSpPr>
+      <p:grpSpPr>
+        <a:xfrm>
+          <a:off x="0" y="0"/>
+          <a:ext cx="0" cy="0"/>
+          <a:chOff x="0" y="0"/>
+          <a:chExt cx="0" cy="0"/>
+        </a:xfrm>
+      </p:grpSpPr>
+      <p:sp>
+        <p:nvSpPr>
+          <p:cNvPr id="2" name="Slide Image Placeholder 1"/>
+          <p:cNvSpPr>
+            <a:spLocks noGrp="1" noRot="1" noChangeAspect="1"/>
+          </p:cNvSpPr>
+          <p:nvPr>
+            <p:ph type="sldImg"/>
+          </p:nvPr>
+        </p:nvSpPr>
+        <p:spPr/>
+      </p:sp>
+      <p:sp>
+        <p:nvSpPr>
+          <p:cNvPr id="3" name="Notes Placeholder 2"/>
+          <p:cNvSpPr>
+            <a:spLocks noGrp="1"/>
+          </p:cNvSpPr>
+          <p:nvPr>
+            <p:ph type="body" idx="1"/>
+          </p:nvPr>
+        </p:nvSpPr>
+        <p:spPr/>
+        <p:txBody>
+          <a:bodyPr/>
+          <a:lstStyle/>
+          <a:p>
+            <a:pPr marL="0" marR="0" lvl="0" indent="0" algn="l" defTabSz="914400" rtl="0" eaLnBrk="1" fontAlgn="auto" latinLnBrk="0" hangingPunct="1">
+              <a:lnSpc>
+                <a:spcPct val="100000"/>
+              </a:lnSpc>
+              <a:spcBef>
+                <a:spcPts val="0"/>
+              </a:spcBef>
+              <a:spcAft>
+                <a:spcPts val="0"/>
+              </a:spcAft>
+              <a:buClrTx/>
+              <a:buSzTx/>
+              <a:buFontTx/>
+              <a:buNone/>
+              <a:tabLst/>
+              <a:defRPr/>
+            </a:pPr>
+            <a:r>
+              <a:rPr lang="ru-RU" sz="1200" kern="1200" dirty="0">
+                <a:solidFill>
+                  <a:schemeClr val="tx1"/>
+                </a:solidFill>
+                <a:effectLst/>
+                <a:latin typeface="+mn-lt"/>
+                <a:ea typeface="+mn-ea"/>
+                <a:cs typeface="+mn-cs"/>
+              </a:rPr>
+              <a:t>Из-за доступа редакторов и развитию генеративного искусственного интеллекта массовое создание поддельных изображений стало реальной угрозой информационной безопасности. Существующие методы часто недостаточно точны и не обладают нужной устойчивостью к постобработке.</a:t>
+            </a:r>
+            <a:endParaRPr lang="en-US" sz="1200" kern="1200" dirty="0">
+              <a:solidFill>
+                <a:schemeClr val="tx1"/>
+              </a:solidFill>
+              <a:effectLst/>
+              <a:latin typeface="+mn-lt"/>
+              <a:ea typeface="+mn-ea"/>
+              <a:cs typeface="+mn-cs"/>
+            </a:endParaRPr>
+          </a:p>
+          <a:p>
+            <a:endParaRPr lang="en-US" dirty="0"/>
+          </a:p>
+        </p:txBody>
+      </p:sp>
+      <p:sp>
+        <p:nvSpPr>
+          <p:cNvPr id="4" name="Slide Number Placeholder 3"/>
+          <p:cNvSpPr>
+            <a:spLocks noGrp="1"/>
+          </p:cNvSpPr>
+          <p:nvPr>
+            <p:ph type="sldNum" sz="quarter" idx="5"/>
+          </p:nvPr>
+        </p:nvSpPr>
+        <p:spPr/>
+        <p:txBody>
+          <a:bodyPr/>
+          <a:lstStyle/>
+          <a:p>
+            <a:fld id="{7B721744-D43C-422F-B42D-F891E80211BA}" type="slidenum">
+              <a:rPr lang="ru-RU" smtClean="0"/>
+              <a:t>2</a:t>
+            </a:fld>
+            <a:endParaRPr lang="ru-RU"/>
+          </a:p>
+        </p:txBody>
+      </p:sp>
+    </p:spTree>
+    <p:extLst>
+      <p:ext uri="{BB962C8B-B14F-4D97-AF65-F5344CB8AC3E}">
+        <p14:creationId xmlns:p14="http://schemas.microsoft.com/office/powerpoint/2010/main" val="1208257860"/>
+      </p:ext>
+    </p:extLst>
+  </p:cSld>
+  <p:clrMapOvr>
+    <a:masterClrMapping/>
+  </p:clrMapOvr>
+</p:notes>
+</file>
+
+<file path=ppt/notesSlides/notesSlide3.xml><?xml version="1.0" encoding="utf-8"?>
+<p:notes xmlns:a="http://schemas.openxmlformats.org/drawingml/2006/main" xmlns:r="http://schemas.openxmlformats.org/officeDocument/2006/relationships" xmlns:p="http://schemas.openxmlformats.org/presentationml/2006/main">
+  <p:cSld>
+    <p:spTree>
+      <p:nvGrpSpPr>
+        <p:cNvPr id="1" name=""/>
+        <p:cNvGrpSpPr/>
+        <p:nvPr/>
+      </p:nvGrpSpPr>
+      <p:grpSpPr>
+        <a:xfrm>
+          <a:off x="0" y="0"/>
+          <a:ext cx="0" cy="0"/>
+          <a:chOff x="0" y="0"/>
+          <a:chExt cx="0" cy="0"/>
+        </a:xfrm>
+      </p:grpSpPr>
+      <p:sp>
+        <p:nvSpPr>
+          <p:cNvPr id="2" name="Slide Image Placeholder 1"/>
+          <p:cNvSpPr>
+            <a:spLocks noGrp="1" noRot="1" noChangeAspect="1"/>
+          </p:cNvSpPr>
+          <p:nvPr>
+            <p:ph type="sldImg"/>
+          </p:nvPr>
+        </p:nvSpPr>
+        <p:spPr/>
+      </p:sp>
+      <p:sp>
+        <p:nvSpPr>
+          <p:cNvPr id="3" name="Notes Placeholder 2"/>
+          <p:cNvSpPr>
+            <a:spLocks noGrp="1"/>
+          </p:cNvSpPr>
+          <p:nvPr>
+            <p:ph type="body" idx="1"/>
+          </p:nvPr>
+        </p:nvSpPr>
+        <p:spPr/>
+        <p:txBody>
+          <a:bodyPr/>
+          <a:lstStyle/>
+          <a:p>
+            <a:pPr marL="0" marR="0" lvl="0" indent="0" algn="l" defTabSz="914400" rtl="0" eaLnBrk="1" fontAlgn="auto" latinLnBrk="0" hangingPunct="1">
+              <a:lnSpc>
+                <a:spcPct val="100000"/>
+              </a:lnSpc>
+              <a:spcBef>
+                <a:spcPts val="0"/>
+              </a:spcBef>
+              <a:spcAft>
+                <a:spcPts val="0"/>
+              </a:spcAft>
+              <a:buClrTx/>
+              <a:buSzTx/>
+              <a:buFontTx/>
+              <a:buNone/>
+              <a:tabLst/>
+              <a:defRPr/>
+            </a:pPr>
+            <a:r>
+              <a:rPr lang="ru-RU" sz="1200" kern="1200" dirty="0">
+                <a:solidFill>
+                  <a:schemeClr val="tx1"/>
+                </a:solidFill>
+                <a:effectLst/>
+                <a:latin typeface="+mn-lt"/>
+                <a:ea typeface="+mn-ea"/>
+                <a:cs typeface="+mn-cs"/>
+              </a:rPr>
+              <a:t>Цель работы являются разработка и программная реализация метод </a:t>
+            </a:r>
+            <a:r>
+              <a:rPr lang="ru-RU" dirty="0">
+                <a:latin typeface="Times New Roman" panose="02020603050405020304" pitchFamily="18" charset="0"/>
+                <a:cs typeface="Times New Roman" panose="02020603050405020304" pitchFamily="18" charset="0"/>
+              </a:rPr>
+              <a:t>обнаружения фальсифицированного фрагмента на изображении с использованием сверточной нейронной сети. </a:t>
+            </a:r>
+            <a:r>
+              <a:rPr lang="ru-RU" sz="1200" kern="1200" dirty="0">
+                <a:solidFill>
+                  <a:schemeClr val="tx1"/>
+                </a:solidFill>
+                <a:effectLst/>
+                <a:latin typeface="+mn-lt"/>
+                <a:ea typeface="+mn-ea"/>
+                <a:cs typeface="+mn-cs"/>
+              </a:rPr>
+              <a:t>Для достижения поставленной цели необходимо решить все задачи, которые показал на третрем слайде.</a:t>
+            </a:r>
+            <a:endParaRPr lang="en-US" dirty="0"/>
+          </a:p>
+        </p:txBody>
+      </p:sp>
+      <p:sp>
+        <p:nvSpPr>
+          <p:cNvPr id="4" name="Slide Number Placeholder 3"/>
+          <p:cNvSpPr>
+            <a:spLocks noGrp="1"/>
+          </p:cNvSpPr>
+          <p:nvPr>
+            <p:ph type="sldNum" sz="quarter" idx="5"/>
+          </p:nvPr>
+        </p:nvSpPr>
+        <p:spPr/>
+        <p:txBody>
+          <a:bodyPr/>
+          <a:lstStyle/>
+          <a:p>
+            <a:fld id="{7B721744-D43C-422F-B42D-F891E80211BA}" type="slidenum">
+              <a:rPr lang="ru-RU" smtClean="0"/>
+              <a:t>3</a:t>
+            </a:fld>
+            <a:endParaRPr lang="ru-RU"/>
+          </a:p>
+        </p:txBody>
+      </p:sp>
+    </p:spTree>
+    <p:extLst>
+      <p:ext uri="{BB962C8B-B14F-4D97-AF65-F5344CB8AC3E}">
+        <p14:creationId xmlns:p14="http://schemas.microsoft.com/office/powerpoint/2010/main" val="1496920371"/>
+      </p:ext>
+    </p:extLst>
+  </p:cSld>
+  <p:clrMapOvr>
+    <a:masterClrMapping/>
+  </p:clrMapOvr>
+</p:notes>
+</file>
+
+<file path=ppt/notesSlides/notesSlide4.xml><?xml version="1.0" encoding="utf-8"?>
+<p:notes xmlns:a="http://schemas.openxmlformats.org/drawingml/2006/main" xmlns:r="http://schemas.openxmlformats.org/officeDocument/2006/relationships" xmlns:p="http://schemas.openxmlformats.org/presentationml/2006/main">
+  <p:cSld>
+    <p:spTree>
+      <p:nvGrpSpPr>
+        <p:cNvPr id="1" name=""/>
+        <p:cNvGrpSpPr/>
+        <p:nvPr/>
+      </p:nvGrpSpPr>
+      <p:grpSpPr>
+        <a:xfrm>
+          <a:off x="0" y="0"/>
+          <a:ext cx="0" cy="0"/>
+          <a:chOff x="0" y="0"/>
+          <a:chExt cx="0" cy="0"/>
+        </a:xfrm>
+      </p:grpSpPr>
+      <p:sp>
+        <p:nvSpPr>
+          <p:cNvPr id="2" name="Slide Image Placeholder 1"/>
+          <p:cNvSpPr>
+            <a:spLocks noGrp="1" noRot="1" noChangeAspect="1"/>
+          </p:cNvSpPr>
+          <p:nvPr>
+            <p:ph type="sldImg"/>
+          </p:nvPr>
+        </p:nvSpPr>
+        <p:spPr/>
+      </p:sp>
+      <p:sp>
+        <p:nvSpPr>
+          <p:cNvPr id="3" name="Notes Placeholder 2"/>
+          <p:cNvSpPr>
+            <a:spLocks noGrp="1"/>
+          </p:cNvSpPr>
+          <p:nvPr>
+            <p:ph type="body" idx="1"/>
+          </p:nvPr>
+        </p:nvSpPr>
+        <p:spPr/>
+        <p:txBody>
+          <a:bodyPr/>
+          <a:lstStyle/>
+          <a:p>
+            <a:pPr marL="0" marR="0" lvl="0" indent="0" algn="l" defTabSz="914400" rtl="0" eaLnBrk="1" fontAlgn="auto" latinLnBrk="0" hangingPunct="1">
+              <a:lnSpc>
+                <a:spcPct val="100000"/>
+              </a:lnSpc>
+              <a:spcBef>
+                <a:spcPts val="0"/>
+              </a:spcBef>
+              <a:spcAft>
+                <a:spcPts val="0"/>
+              </a:spcAft>
+              <a:buClrTx/>
+              <a:buSzTx/>
+              <a:buFontTx/>
+              <a:buNone/>
+              <a:tabLst/>
+              <a:defRPr/>
+            </a:pPr>
+            <a:r>
+              <a:rPr lang="ru-RU" sz="1200" kern="1200" dirty="0">
+                <a:solidFill>
+                  <a:schemeClr val="tx1"/>
+                </a:solidFill>
+                <a:effectLst/>
+                <a:latin typeface="+mn-lt"/>
+                <a:ea typeface="+mn-ea"/>
+                <a:cs typeface="+mn-cs"/>
+              </a:rPr>
+              <a:t>На четвёртом слайде представлено сравнение существующих подходов.</a:t>
+            </a:r>
+            <a:endParaRPr lang="en-US" sz="1200" kern="1200" dirty="0">
+              <a:solidFill>
+                <a:schemeClr val="tx1"/>
+              </a:solidFill>
+              <a:effectLst/>
+              <a:latin typeface="+mn-lt"/>
+              <a:ea typeface="+mn-ea"/>
+              <a:cs typeface="+mn-cs"/>
+            </a:endParaRPr>
+          </a:p>
+          <a:p>
+            <a:pPr marL="0" marR="0" lvl="0" indent="0" algn="l" defTabSz="914400" rtl="0" eaLnBrk="1" fontAlgn="auto" latinLnBrk="0" hangingPunct="1">
+              <a:lnSpc>
+                <a:spcPct val="100000"/>
+              </a:lnSpc>
+              <a:spcBef>
+                <a:spcPts val="0"/>
+              </a:spcBef>
+              <a:spcAft>
+                <a:spcPts val="0"/>
+              </a:spcAft>
+              <a:buClrTx/>
+              <a:buSzTx/>
+              <a:buFontTx/>
+              <a:buNone/>
+              <a:tabLst/>
+              <a:defRPr/>
+            </a:pPr>
+            <a:r>
+              <a:rPr lang="ru-RU" sz="1200" kern="1200" dirty="0">
+                <a:solidFill>
+                  <a:schemeClr val="tx1"/>
+                </a:solidFill>
+                <a:effectLst/>
+                <a:latin typeface="+mn-lt"/>
+                <a:ea typeface="+mn-ea"/>
+                <a:cs typeface="+mn-cs"/>
+              </a:rPr>
+              <a:t>Как показано в таблице, традиционные методы имеют низкую или среднюю точность и обобщающую способность. Предлагаемая многопоточная сверточная сеть обеспечивает высокие показатели по всем трём критериям.</a:t>
+            </a:r>
+            <a:endParaRPr lang="en-US" sz="1200" kern="1200" dirty="0">
+              <a:solidFill>
+                <a:schemeClr val="tx1"/>
+              </a:solidFill>
+              <a:effectLst/>
+              <a:latin typeface="+mn-lt"/>
+              <a:ea typeface="+mn-ea"/>
+              <a:cs typeface="+mn-cs"/>
+            </a:endParaRPr>
+          </a:p>
+          <a:p>
+            <a:endParaRPr lang="en-US" dirty="0"/>
+          </a:p>
+        </p:txBody>
+      </p:sp>
+      <p:sp>
+        <p:nvSpPr>
+          <p:cNvPr id="4" name="Slide Number Placeholder 3"/>
+          <p:cNvSpPr>
+            <a:spLocks noGrp="1"/>
+          </p:cNvSpPr>
+          <p:nvPr>
+            <p:ph type="sldNum" sz="quarter" idx="5"/>
+          </p:nvPr>
+        </p:nvSpPr>
+        <p:spPr/>
+        <p:txBody>
+          <a:bodyPr/>
+          <a:lstStyle/>
+          <a:p>
+            <a:fld id="{7B721744-D43C-422F-B42D-F891E80211BA}" type="slidenum">
+              <a:rPr lang="ru-RU" smtClean="0"/>
+              <a:t>4</a:t>
+            </a:fld>
+            <a:endParaRPr lang="ru-RU"/>
+          </a:p>
+        </p:txBody>
+      </p:sp>
+    </p:spTree>
+    <p:extLst>
+      <p:ext uri="{BB962C8B-B14F-4D97-AF65-F5344CB8AC3E}">
+        <p14:creationId xmlns:p14="http://schemas.microsoft.com/office/powerpoint/2010/main" val="4112667537"/>
+      </p:ext>
+    </p:extLst>
+  </p:cSld>
+  <p:clrMapOvr>
+    <a:masterClrMapping/>
+  </p:clrMapOvr>
+</p:notes>
+</file>
+
+<file path=ppt/notesSlides/notesSlide5.xml><?xml version="1.0" encoding="utf-8"?>
+<p:notes xmlns:a="http://schemas.openxmlformats.org/drawingml/2006/main" xmlns:r="http://schemas.openxmlformats.org/officeDocument/2006/relationships" xmlns:p="http://schemas.openxmlformats.org/presentationml/2006/main">
+  <p:cSld>
+    <p:spTree>
+      <p:nvGrpSpPr>
+        <p:cNvPr id="1" name=""/>
+        <p:cNvGrpSpPr/>
+        <p:nvPr/>
+      </p:nvGrpSpPr>
+      <p:grpSpPr>
+        <a:xfrm>
+          <a:off x="0" y="0"/>
+          <a:ext cx="0" cy="0"/>
+          <a:chOff x="0" y="0"/>
+          <a:chExt cx="0" cy="0"/>
+        </a:xfrm>
+      </p:grpSpPr>
+      <p:sp>
+        <p:nvSpPr>
+          <p:cNvPr id="2" name="Slide Image Placeholder 1"/>
+          <p:cNvSpPr>
+            <a:spLocks noGrp="1" noRot="1" noChangeAspect="1"/>
+          </p:cNvSpPr>
+          <p:nvPr>
+            <p:ph type="sldImg"/>
+          </p:nvPr>
+        </p:nvSpPr>
+        <p:spPr/>
+      </p:sp>
+      <p:sp>
+        <p:nvSpPr>
+          <p:cNvPr id="3" name="Notes Placeholder 2"/>
+          <p:cNvSpPr>
+            <a:spLocks noGrp="1"/>
+          </p:cNvSpPr>
+          <p:nvPr>
+            <p:ph type="body" idx="1"/>
+          </p:nvPr>
+        </p:nvSpPr>
+        <p:spPr/>
+        <p:txBody>
+          <a:bodyPr/>
+          <a:lstStyle/>
+          <a:p>
+            <a:r>
+              <a:rPr lang="ru-RU" sz="1200" kern="1200" dirty="0">
+                <a:solidFill>
+                  <a:schemeClr val="tx1"/>
+                </a:solidFill>
+                <a:effectLst/>
+                <a:latin typeface="+mn-lt"/>
+                <a:ea typeface="+mn-ea"/>
+                <a:cs typeface="+mn-cs"/>
+              </a:rPr>
+              <a:t>На пятом слайде показана формализация задачи в нотации </a:t>
+            </a:r>
+            <a:r>
+              <a:rPr lang="en-US" sz="1200" kern="1200" dirty="0">
+                <a:solidFill>
+                  <a:schemeClr val="tx1"/>
+                </a:solidFill>
+                <a:effectLst/>
+                <a:latin typeface="+mn-lt"/>
+                <a:ea typeface="+mn-ea"/>
+                <a:cs typeface="+mn-cs"/>
+              </a:rPr>
+              <a:t>IDEF</a:t>
+            </a:r>
+            <a:r>
+              <a:rPr lang="ru-RU" sz="1200" kern="1200" dirty="0">
+                <a:solidFill>
+                  <a:schemeClr val="tx1"/>
+                </a:solidFill>
+                <a:effectLst/>
+                <a:latin typeface="+mn-lt"/>
+                <a:ea typeface="+mn-ea"/>
+                <a:cs typeface="+mn-cs"/>
+              </a:rPr>
+              <a:t>0.</a:t>
+            </a:r>
+            <a:endParaRPr lang="en-US" sz="1200" kern="1200" dirty="0">
+              <a:solidFill>
+                <a:schemeClr val="tx1"/>
+              </a:solidFill>
+              <a:effectLst/>
+              <a:latin typeface="+mn-lt"/>
+              <a:ea typeface="+mn-ea"/>
+              <a:cs typeface="+mn-cs"/>
+            </a:endParaRPr>
+          </a:p>
+          <a:p>
+            <a:r>
+              <a:rPr lang="ru-RU" sz="1200" kern="1200" dirty="0">
+                <a:solidFill>
+                  <a:schemeClr val="tx1"/>
+                </a:solidFill>
+                <a:effectLst/>
+                <a:latin typeface="+mn-lt"/>
+                <a:ea typeface="+mn-ea"/>
+                <a:cs typeface="+mn-cs"/>
+              </a:rPr>
+              <a:t>На вход метода поступают набор данных и изображение. На выходе мы получаем прогнозируемую маску фальсифицированного фрагмента.</a:t>
+            </a:r>
+            <a:endParaRPr lang="en-US" sz="1200" kern="1200" dirty="0">
+              <a:solidFill>
+                <a:schemeClr val="tx1"/>
+              </a:solidFill>
+              <a:effectLst/>
+              <a:latin typeface="+mn-lt"/>
+              <a:ea typeface="+mn-ea"/>
+              <a:cs typeface="+mn-cs"/>
+            </a:endParaRPr>
+          </a:p>
+          <a:p>
+            <a:endParaRPr lang="en-US" dirty="0"/>
+          </a:p>
+        </p:txBody>
+      </p:sp>
+      <p:sp>
+        <p:nvSpPr>
+          <p:cNvPr id="4" name="Slide Number Placeholder 3"/>
+          <p:cNvSpPr>
+            <a:spLocks noGrp="1"/>
+          </p:cNvSpPr>
+          <p:nvPr>
+            <p:ph type="sldNum" sz="quarter" idx="5"/>
+          </p:nvPr>
+        </p:nvSpPr>
+        <p:spPr/>
+        <p:txBody>
+          <a:bodyPr/>
+          <a:lstStyle/>
+          <a:p>
+            <a:fld id="{7B721744-D43C-422F-B42D-F891E80211BA}" type="slidenum">
+              <a:rPr lang="ru-RU" smtClean="0"/>
+              <a:t>5</a:t>
+            </a:fld>
+            <a:endParaRPr lang="ru-RU"/>
+          </a:p>
+        </p:txBody>
+      </p:sp>
+    </p:spTree>
+    <p:extLst>
+      <p:ext uri="{BB962C8B-B14F-4D97-AF65-F5344CB8AC3E}">
+        <p14:creationId xmlns:p14="http://schemas.microsoft.com/office/powerpoint/2010/main" val="1619562213"/>
+      </p:ext>
+    </p:extLst>
+  </p:cSld>
+  <p:clrMapOvr>
+    <a:masterClrMapping/>
+  </p:clrMapOvr>
+</p:notes>
+</file>
+
+<file path=ppt/notesSlides/notesSlide6.xml><?xml version="1.0" encoding="utf-8"?>
+<p:notes xmlns:a="http://schemas.openxmlformats.org/drawingml/2006/main" xmlns:r="http://schemas.openxmlformats.org/officeDocument/2006/relationships" xmlns:p="http://schemas.openxmlformats.org/presentationml/2006/main">
+  <p:cSld>
+    <p:spTree>
+      <p:nvGrpSpPr>
+        <p:cNvPr id="1" name=""/>
+        <p:cNvGrpSpPr/>
+        <p:nvPr/>
+      </p:nvGrpSpPr>
+      <p:grpSpPr>
+        <a:xfrm>
+          <a:off x="0" y="0"/>
+          <a:ext cx="0" cy="0"/>
+          <a:chOff x="0" y="0"/>
+          <a:chExt cx="0" cy="0"/>
+        </a:xfrm>
+      </p:grpSpPr>
+      <p:sp>
+        <p:nvSpPr>
+          <p:cNvPr id="2" name="Slide Image Placeholder 1"/>
+          <p:cNvSpPr>
+            <a:spLocks noGrp="1" noRot="1" noChangeAspect="1"/>
+          </p:cNvSpPr>
+          <p:nvPr>
+            <p:ph type="sldImg"/>
+          </p:nvPr>
+        </p:nvSpPr>
+        <p:spPr/>
+      </p:sp>
+      <p:sp>
+        <p:nvSpPr>
+          <p:cNvPr id="3" name="Notes Placeholder 2"/>
+          <p:cNvSpPr>
+            <a:spLocks noGrp="1"/>
+          </p:cNvSpPr>
+          <p:nvPr>
+            <p:ph type="body" idx="1"/>
+          </p:nvPr>
+        </p:nvSpPr>
+        <p:spPr/>
+        <p:txBody>
+          <a:bodyPr/>
+          <a:lstStyle/>
+          <a:p>
+            <a:pPr marL="0" marR="0" lvl="0" indent="0" algn="l" defTabSz="914400" rtl="0" eaLnBrk="1" fontAlgn="auto" latinLnBrk="0" hangingPunct="1">
+              <a:lnSpc>
+                <a:spcPct val="100000"/>
+              </a:lnSpc>
+              <a:spcBef>
+                <a:spcPts val="0"/>
+              </a:spcBef>
+              <a:spcAft>
+                <a:spcPts val="0"/>
+              </a:spcAft>
+              <a:buClrTx/>
+              <a:buSzTx/>
+              <a:buFontTx/>
+              <a:buNone/>
+              <a:tabLst/>
+              <a:defRPr/>
+            </a:pPr>
+            <a:r>
+              <a:rPr lang="ru-RU" sz="1200" kern="1200" dirty="0">
+                <a:solidFill>
+                  <a:schemeClr val="tx1"/>
+                </a:solidFill>
+                <a:effectLst/>
+                <a:latin typeface="+mn-lt"/>
+                <a:ea typeface="+mn-ea"/>
+                <a:cs typeface="+mn-cs"/>
+              </a:rPr>
+              <a:t>Шестой слайд демонстрирует детальную функциональную модель разработанного метода.</a:t>
+            </a:r>
+            <a:endParaRPr lang="en-US" sz="1200" kern="1200" dirty="0">
+              <a:solidFill>
+                <a:schemeClr val="tx1"/>
+              </a:solidFill>
+              <a:effectLst/>
+              <a:latin typeface="+mn-lt"/>
+              <a:ea typeface="+mn-ea"/>
+              <a:cs typeface="+mn-cs"/>
+            </a:endParaRPr>
+          </a:p>
+          <a:p>
+            <a:pPr marL="0" marR="0" lvl="0" indent="0" algn="l" defTabSz="914400" rtl="0" eaLnBrk="1" fontAlgn="auto" latinLnBrk="0" hangingPunct="1">
+              <a:lnSpc>
+                <a:spcPct val="100000"/>
+              </a:lnSpc>
+              <a:spcBef>
+                <a:spcPts val="0"/>
+              </a:spcBef>
+              <a:spcAft>
+                <a:spcPts val="0"/>
+              </a:spcAft>
+              <a:buClrTx/>
+              <a:buSzTx/>
+              <a:buFontTx/>
+              <a:buNone/>
+              <a:tabLst/>
+              <a:defRPr/>
+            </a:pPr>
+            <a:r>
+              <a:rPr lang="ru-RU" sz="1200" kern="1200" dirty="0">
+                <a:solidFill>
+                  <a:schemeClr val="tx1"/>
+                </a:solidFill>
+                <a:effectLst/>
+                <a:latin typeface="+mn-lt"/>
+                <a:ea typeface="+mn-ea"/>
+                <a:cs typeface="+mn-cs"/>
+              </a:rPr>
+              <a:t>Метод состоит из четырёх последовательных этапов: предобработка, извлечение шумовых признаков, обучение двухпоточной модели и, наконец, непосредственно обнаружение фальсификации на новых изображениях.</a:t>
+            </a:r>
+            <a:endParaRPr lang="en-US" sz="1200" kern="1200" dirty="0">
+              <a:solidFill>
+                <a:schemeClr val="tx1"/>
+              </a:solidFill>
+              <a:effectLst/>
+              <a:latin typeface="+mn-lt"/>
+              <a:ea typeface="+mn-ea"/>
+              <a:cs typeface="+mn-cs"/>
+            </a:endParaRPr>
+          </a:p>
+          <a:p>
+            <a:endParaRPr lang="vi-VN" dirty="0"/>
+          </a:p>
+          <a:p>
+            <a:pPr marL="0" marR="0" lvl="0" indent="0" algn="l" defTabSz="914400" rtl="0" eaLnBrk="1" fontAlgn="auto" latinLnBrk="0" hangingPunct="1">
+              <a:lnSpc>
+                <a:spcPct val="100000"/>
+              </a:lnSpc>
+              <a:spcBef>
+                <a:spcPts val="0"/>
+              </a:spcBef>
+              <a:spcAft>
+                <a:spcPts val="0"/>
+              </a:spcAft>
+              <a:buClrTx/>
+              <a:buSzTx/>
+              <a:buFontTx/>
+              <a:buNone/>
+              <a:tabLst/>
+              <a:defRPr/>
+            </a:pPr>
+            <a:r>
+              <a:rPr lang="ru-RU" dirty="0">
+                <a:effectLst/>
+              </a:rPr>
+              <a:t>Мы не показываем все стрелки на верхнем уровне, чтобы не перегружать схему.</a:t>
+            </a:r>
+          </a:p>
+        </p:txBody>
+      </p:sp>
+      <p:sp>
+        <p:nvSpPr>
+          <p:cNvPr id="4" name="Slide Number Placeholder 3"/>
+          <p:cNvSpPr>
+            <a:spLocks noGrp="1"/>
+          </p:cNvSpPr>
+          <p:nvPr>
+            <p:ph type="sldNum" sz="quarter" idx="5"/>
+          </p:nvPr>
+        </p:nvSpPr>
+        <p:spPr/>
+        <p:txBody>
+          <a:bodyPr/>
+          <a:lstStyle/>
+          <a:p>
+            <a:fld id="{7B721744-D43C-422F-B42D-F891E80211BA}" type="slidenum">
+              <a:rPr lang="ru-RU" smtClean="0"/>
+              <a:t>6</a:t>
+            </a:fld>
+            <a:endParaRPr lang="ru-RU"/>
+          </a:p>
+        </p:txBody>
+      </p:sp>
+    </p:spTree>
+    <p:extLst>
+      <p:ext uri="{BB962C8B-B14F-4D97-AF65-F5344CB8AC3E}">
+        <p14:creationId xmlns:p14="http://schemas.microsoft.com/office/powerpoint/2010/main" val="4189431796"/>
+      </p:ext>
+    </p:extLst>
+  </p:cSld>
+  <p:clrMapOvr>
+    <a:masterClrMapping/>
+  </p:clrMapOvr>
+</p:notes>
+</file>
+
+<file path=ppt/notesSlides/notesSlide7.xml><?xml version="1.0" encoding="utf-8"?>
+<p:notes xmlns:a="http://schemas.openxmlformats.org/drawingml/2006/main" xmlns:r="http://schemas.openxmlformats.org/officeDocument/2006/relationships" xmlns:p="http://schemas.openxmlformats.org/presentationml/2006/main">
+  <p:cSld>
+    <p:spTree>
+      <p:nvGrpSpPr>
+        <p:cNvPr id="1" name=""/>
+        <p:cNvGrpSpPr/>
+        <p:nvPr/>
+      </p:nvGrpSpPr>
+      <p:grpSpPr>
+        <a:xfrm>
+          <a:off x="0" y="0"/>
+          <a:ext cx="0" cy="0"/>
+          <a:chOff x="0" y="0"/>
+          <a:chExt cx="0" cy="0"/>
+        </a:xfrm>
+      </p:grpSpPr>
+      <p:sp>
+        <p:nvSpPr>
+          <p:cNvPr id="2" name="Slide Image Placeholder 1"/>
+          <p:cNvSpPr>
+            <a:spLocks noGrp="1" noRot="1" noChangeAspect="1"/>
+          </p:cNvSpPr>
+          <p:nvPr>
+            <p:ph type="sldImg"/>
+          </p:nvPr>
+        </p:nvSpPr>
+        <p:spPr/>
+      </p:sp>
+      <p:sp>
+        <p:nvSpPr>
+          <p:cNvPr id="3" name="Notes Placeholder 2"/>
+          <p:cNvSpPr>
+            <a:spLocks noGrp="1"/>
+          </p:cNvSpPr>
+          <p:nvPr>
+            <p:ph type="body" idx="1"/>
+          </p:nvPr>
+        </p:nvSpPr>
+        <p:spPr/>
+        <p:txBody>
+          <a:bodyPr/>
+          <a:lstStyle/>
+          <a:p>
+            <a:r>
+              <a:rPr lang="ru-RU" sz="1200" kern="1200" dirty="0">
+                <a:solidFill>
+                  <a:schemeClr val="tx1"/>
+                </a:solidFill>
+                <a:effectLst/>
+                <a:latin typeface="+mn-lt"/>
+                <a:ea typeface="+mn-ea"/>
+                <a:cs typeface="+mn-cs"/>
+              </a:rPr>
+              <a:t>На седьмом слайде представлен алгоритм извлечения признаков.</a:t>
+            </a:r>
+            <a:endParaRPr lang="en-US" sz="1200" kern="1200" dirty="0">
+              <a:solidFill>
+                <a:schemeClr val="tx1"/>
+              </a:solidFill>
+              <a:effectLst/>
+              <a:latin typeface="+mn-lt"/>
+              <a:ea typeface="+mn-ea"/>
+              <a:cs typeface="+mn-cs"/>
+            </a:endParaRPr>
+          </a:p>
+          <a:p>
+            <a:r>
+              <a:rPr lang="ru-RU" sz="1200" kern="1200" dirty="0">
+                <a:solidFill>
+                  <a:schemeClr val="tx1"/>
+                </a:solidFill>
+                <a:effectLst/>
+                <a:latin typeface="+mn-lt"/>
+                <a:ea typeface="+mn-ea"/>
+                <a:cs typeface="+mn-cs"/>
+              </a:rPr>
+              <a:t>На вход подаётся нормализованное изображение. На выходе формируется </a:t>
+            </a:r>
+            <a:r>
+              <a:rPr lang="ru-RU" sz="1200" b="1" kern="1200" dirty="0">
+                <a:solidFill>
+                  <a:schemeClr val="tx1"/>
+                </a:solidFill>
+                <a:effectLst/>
+                <a:latin typeface="+mn-lt"/>
+                <a:ea typeface="+mn-ea"/>
+                <a:cs typeface="+mn-cs"/>
+              </a:rPr>
+              <a:t>карта шумовых</a:t>
+            </a:r>
+            <a:r>
+              <a:rPr lang="ru-RU" sz="1200" kern="1200" dirty="0">
+                <a:solidFill>
+                  <a:schemeClr val="tx1"/>
+                </a:solidFill>
+                <a:effectLst/>
+                <a:latin typeface="+mn-lt"/>
+                <a:ea typeface="+mn-ea"/>
+                <a:cs typeface="+mn-cs"/>
+              </a:rPr>
+              <a:t>. Полученная карта шумовых признаков подчёркивает слабые артефакты фальсификации.</a:t>
+            </a:r>
+            <a:endParaRPr lang="vi-VN" sz="1200" kern="1200" dirty="0">
+              <a:solidFill>
+                <a:schemeClr val="tx1"/>
+              </a:solidFill>
+              <a:effectLst/>
+              <a:latin typeface="+mn-lt"/>
+              <a:ea typeface="+mn-ea"/>
+              <a:cs typeface="+mn-cs"/>
+            </a:endParaRPr>
+          </a:p>
+          <a:p>
+            <a:endParaRPr lang="vi-VN" sz="1200" kern="1200" dirty="0">
+              <a:solidFill>
+                <a:schemeClr val="tx1"/>
+              </a:solidFill>
+              <a:effectLst/>
+              <a:latin typeface="+mn-lt"/>
+              <a:ea typeface="+mn-ea"/>
+              <a:cs typeface="+mn-cs"/>
+            </a:endParaRPr>
+          </a:p>
+          <a:p>
+            <a:pPr marL="0" marR="0" lvl="0" indent="0" algn="l" defTabSz="914400" rtl="0" eaLnBrk="1" fontAlgn="auto" latinLnBrk="0" hangingPunct="1">
+              <a:lnSpc>
+                <a:spcPct val="100000"/>
+              </a:lnSpc>
+              <a:spcBef>
+                <a:spcPts val="0"/>
+              </a:spcBef>
+              <a:spcAft>
+                <a:spcPts val="0"/>
+              </a:spcAft>
+              <a:buClrTx/>
+              <a:buSzTx/>
+              <a:buFontTx/>
+              <a:buNone/>
+              <a:tabLst/>
+              <a:defRPr/>
+            </a:pPr>
+            <a:r>
+              <a:rPr lang="ru-RU" sz="1200" b="0" i="0" kern="1200" dirty="0">
+                <a:solidFill>
+                  <a:schemeClr val="tx1"/>
+                </a:solidFill>
+                <a:effectLst/>
+                <a:latin typeface="+mn-lt"/>
+                <a:ea typeface="+mn-ea"/>
+                <a:cs typeface="+mn-cs"/>
+              </a:rPr>
+              <a:t>Выбор коэффициента сжатия 95% обусловлен необходимостью создания характерных для JPEG потерь, но без критического разрушения структуры изображения. Это позволяет вычислить попиксельную разность между оригиналом и сжатой версией</a:t>
+            </a:r>
+            <a:endParaRPr lang="en-US" dirty="0"/>
+          </a:p>
+          <a:p>
+            <a:endParaRPr lang="en-US" sz="1200" kern="1200" dirty="0">
+              <a:solidFill>
+                <a:schemeClr val="tx1"/>
+              </a:solidFill>
+              <a:effectLst/>
+              <a:latin typeface="+mn-lt"/>
+              <a:ea typeface="+mn-ea"/>
+              <a:cs typeface="+mn-cs"/>
+            </a:endParaRPr>
+          </a:p>
+        </p:txBody>
+      </p:sp>
+      <p:sp>
+        <p:nvSpPr>
+          <p:cNvPr id="4" name="Slide Number Placeholder 3"/>
+          <p:cNvSpPr>
+            <a:spLocks noGrp="1"/>
+          </p:cNvSpPr>
+          <p:nvPr>
+            <p:ph type="sldNum" sz="quarter" idx="5"/>
+          </p:nvPr>
+        </p:nvSpPr>
+        <p:spPr/>
+        <p:txBody>
+          <a:bodyPr/>
+          <a:lstStyle/>
+          <a:p>
+            <a:fld id="{7B721744-D43C-422F-B42D-F891E80211BA}" type="slidenum">
+              <a:rPr lang="ru-RU" smtClean="0"/>
+              <a:t>7</a:t>
+            </a:fld>
+            <a:endParaRPr lang="ru-RU"/>
+          </a:p>
+        </p:txBody>
+      </p:sp>
+    </p:spTree>
+    <p:extLst>
+      <p:ext uri="{BB962C8B-B14F-4D97-AF65-F5344CB8AC3E}">
+        <p14:creationId xmlns:p14="http://schemas.microsoft.com/office/powerpoint/2010/main" val="2587805359"/>
+      </p:ext>
+    </p:extLst>
+  </p:cSld>
+  <p:clrMapOvr>
+    <a:masterClrMapping/>
+  </p:clrMapOvr>
+</p:notes>
+</file>
+
+<file path=ppt/notesSlides/notesSlide8.xml><?xml version="1.0" encoding="utf-8"?>
+<p:notes xmlns:a="http://schemas.openxmlformats.org/drawingml/2006/main" xmlns:r="http://schemas.openxmlformats.org/officeDocument/2006/relationships" xmlns:p="http://schemas.openxmlformats.org/presentationml/2006/main">
+  <p:cSld>
+    <p:spTree>
+      <p:nvGrpSpPr>
+        <p:cNvPr id="1" name=""/>
+        <p:cNvGrpSpPr/>
+        <p:nvPr/>
+      </p:nvGrpSpPr>
+      <p:grpSpPr>
+        <a:xfrm>
+          <a:off x="0" y="0"/>
+          <a:ext cx="0" cy="0"/>
+          <a:chOff x="0" y="0"/>
+          <a:chExt cx="0" cy="0"/>
+        </a:xfrm>
+      </p:grpSpPr>
+      <p:sp>
+        <p:nvSpPr>
+          <p:cNvPr id="2" name="Slide Image Placeholder 1"/>
+          <p:cNvSpPr>
+            <a:spLocks noGrp="1" noRot="1" noChangeAspect="1"/>
+          </p:cNvSpPr>
+          <p:nvPr>
+            <p:ph type="sldImg"/>
+          </p:nvPr>
+        </p:nvSpPr>
+        <p:spPr/>
+      </p:sp>
+      <p:sp>
+        <p:nvSpPr>
+          <p:cNvPr id="3" name="Notes Placeholder 2"/>
+          <p:cNvSpPr>
+            <a:spLocks noGrp="1"/>
+          </p:cNvSpPr>
+          <p:nvPr>
+            <p:ph type="body" idx="1"/>
+          </p:nvPr>
+        </p:nvSpPr>
+        <p:spPr/>
+        <p:txBody>
+          <a:bodyPr/>
+          <a:lstStyle/>
+          <a:p>
+            <a:pPr marL="0" marR="0" lvl="0" indent="0" algn="l" defTabSz="914400" rtl="0" eaLnBrk="1" fontAlgn="auto" latinLnBrk="0" hangingPunct="1">
+              <a:lnSpc>
+                <a:spcPct val="100000"/>
+              </a:lnSpc>
+              <a:spcBef>
+                <a:spcPts val="0"/>
+              </a:spcBef>
+              <a:spcAft>
+                <a:spcPts val="0"/>
+              </a:spcAft>
+              <a:buClrTx/>
+              <a:buSzTx/>
+              <a:buFontTx/>
+              <a:buNone/>
+              <a:tabLst/>
+              <a:defRPr/>
+            </a:pPr>
+            <a:r>
+              <a:rPr lang="ru-RU" sz="1200" kern="1200" dirty="0">
+                <a:solidFill>
+                  <a:schemeClr val="tx1"/>
+                </a:solidFill>
+                <a:effectLst/>
+                <a:latin typeface="+mn-lt"/>
+                <a:ea typeface="+mn-ea"/>
+                <a:cs typeface="+mn-cs"/>
+              </a:rPr>
+              <a:t>Архитектура включает два параллельных потока: один работает с цветлым изображением, другой — с картой шумовых признаков. Затем потоки сливаются, проходят через слои адаптации и внимания, и формирует итоговую маску.</a:t>
+            </a:r>
+            <a:endParaRPr lang="en-US" sz="1200" kern="1200" dirty="0">
+              <a:solidFill>
+                <a:schemeClr val="tx1"/>
+              </a:solidFill>
+              <a:effectLst/>
+              <a:latin typeface="+mn-lt"/>
+              <a:ea typeface="+mn-ea"/>
+              <a:cs typeface="+mn-cs"/>
+            </a:endParaRPr>
+          </a:p>
+          <a:p>
+            <a:endParaRPr lang="vi-VN" dirty="0"/>
+          </a:p>
+        </p:txBody>
+      </p:sp>
+      <p:sp>
+        <p:nvSpPr>
+          <p:cNvPr id="4" name="Slide Number Placeholder 3"/>
+          <p:cNvSpPr>
+            <a:spLocks noGrp="1"/>
+          </p:cNvSpPr>
+          <p:nvPr>
+            <p:ph type="sldNum" sz="quarter" idx="5"/>
+          </p:nvPr>
+        </p:nvSpPr>
+        <p:spPr/>
+        <p:txBody>
+          <a:bodyPr/>
+          <a:lstStyle/>
+          <a:p>
+            <a:fld id="{7B721744-D43C-422F-B42D-F891E80211BA}" type="slidenum">
+              <a:rPr lang="ru-RU" smtClean="0"/>
+              <a:t>8</a:t>
+            </a:fld>
+            <a:endParaRPr lang="ru-RU"/>
+          </a:p>
+        </p:txBody>
+      </p:sp>
+    </p:spTree>
+    <p:extLst>
+      <p:ext uri="{BB962C8B-B14F-4D97-AF65-F5344CB8AC3E}">
+        <p14:creationId xmlns:p14="http://schemas.microsoft.com/office/powerpoint/2010/main" val="3855459745"/>
+      </p:ext>
+    </p:extLst>
+  </p:cSld>
+  <p:clrMapOvr>
+    <a:masterClrMapping/>
+  </p:clrMapOvr>
+</p:notes>
+</file>
+
+<file path=ppt/notesSlides/notesSlide9.xml><?xml version="1.0" encoding="utf-8"?>
+<p:notes xmlns:a="http://schemas.openxmlformats.org/drawingml/2006/main" xmlns:r="http://schemas.openxmlformats.org/officeDocument/2006/relationships" xmlns:p="http://schemas.openxmlformats.org/presentationml/2006/main">
+  <p:cSld>
+    <p:spTree>
+      <p:nvGrpSpPr>
+        <p:cNvPr id="1" name=""/>
+        <p:cNvGrpSpPr/>
+        <p:nvPr/>
+      </p:nvGrpSpPr>
+      <p:grpSpPr>
+        <a:xfrm>
+          <a:off x="0" y="0"/>
+          <a:ext cx="0" cy="0"/>
+          <a:chOff x="0" y="0"/>
+          <a:chExt cx="0" cy="0"/>
+        </a:xfrm>
+      </p:grpSpPr>
+      <p:sp>
+        <p:nvSpPr>
+          <p:cNvPr id="2" name="Slide Image Placeholder 1"/>
+          <p:cNvSpPr>
+            <a:spLocks noGrp="1" noRot="1" noChangeAspect="1"/>
+          </p:cNvSpPr>
+          <p:nvPr>
+            <p:ph type="sldImg"/>
+          </p:nvPr>
+        </p:nvSpPr>
+        <p:spPr/>
+      </p:sp>
+      <p:sp>
+        <p:nvSpPr>
+          <p:cNvPr id="3" name="Notes Placeholder 2"/>
+          <p:cNvSpPr>
+            <a:spLocks noGrp="1"/>
+          </p:cNvSpPr>
+          <p:nvPr>
+            <p:ph type="body" idx="1"/>
+          </p:nvPr>
+        </p:nvSpPr>
+        <p:spPr/>
+        <p:txBody>
+          <a:bodyPr/>
+          <a:lstStyle/>
+          <a:p>
+            <a:pPr marL="0" marR="0" lvl="0" indent="0" algn="l" defTabSz="914400" rtl="0" eaLnBrk="1" fontAlgn="auto" latinLnBrk="0" hangingPunct="1">
+              <a:lnSpc>
+                <a:spcPct val="100000"/>
+              </a:lnSpc>
+              <a:spcBef>
+                <a:spcPts val="0"/>
+              </a:spcBef>
+              <a:spcAft>
+                <a:spcPts val="0"/>
+              </a:spcAft>
+              <a:buClrTx/>
+              <a:buSzTx/>
+              <a:buFontTx/>
+              <a:buNone/>
+              <a:tabLst/>
+              <a:defRPr/>
+            </a:pPr>
+            <a:r>
+              <a:rPr lang="ru-RU" sz="1200" kern="1200" dirty="0">
+                <a:solidFill>
+                  <a:schemeClr val="tx1"/>
+                </a:solidFill>
+                <a:effectLst/>
+                <a:latin typeface="+mn-lt"/>
+                <a:ea typeface="+mn-ea"/>
+                <a:cs typeface="+mn-cs"/>
+              </a:rPr>
+              <a:t>На девятом слайде показал конкретнее структуры слоя адаптации признаков и слоя внимания. Слой адаптации признаков в виде остаточного блока согласует шумовую и семантическую информацию, а слой внимания динамически перевешивает важные каналы.</a:t>
+            </a:r>
+            <a:endParaRPr lang="en-US" sz="1200" kern="1200" dirty="0">
+              <a:solidFill>
+                <a:schemeClr val="tx1"/>
+              </a:solidFill>
+              <a:effectLst/>
+              <a:latin typeface="+mn-lt"/>
+              <a:ea typeface="+mn-ea"/>
+              <a:cs typeface="+mn-cs"/>
+            </a:endParaRPr>
+          </a:p>
+          <a:p>
+            <a:endParaRPr lang="vi-VN" dirty="0"/>
+          </a:p>
+          <a:p>
+            <a:pPr marL="0" marR="0" lvl="0" indent="0" algn="l" defTabSz="914400" rtl="0" eaLnBrk="1" fontAlgn="auto" latinLnBrk="0" hangingPunct="1">
+              <a:lnSpc>
+                <a:spcPct val="100000"/>
+              </a:lnSpc>
+              <a:spcBef>
+                <a:spcPts val="0"/>
+              </a:spcBef>
+              <a:spcAft>
+                <a:spcPts val="0"/>
+              </a:spcAft>
+              <a:buClrTx/>
+              <a:buSzTx/>
+              <a:buFontTx/>
+              <a:buNone/>
+              <a:tabLst/>
+              <a:defRPr/>
+            </a:pPr>
+            <a:r>
+              <a:rPr lang="ru-RU" dirty="0">
+                <a:effectLst/>
+              </a:rPr>
+              <a:t>SE-блок проще, легче и эффективнее именно для задачи канальной перекалибровки. Он хорошо работает с нашей двухпоточной архитектурой и меньше увеличивает число параметров.</a:t>
+            </a:r>
+          </a:p>
+          <a:p>
+            <a:endParaRPr lang="en-US" dirty="0"/>
+          </a:p>
+        </p:txBody>
+      </p:sp>
+      <p:sp>
+        <p:nvSpPr>
+          <p:cNvPr id="4" name="Slide Number Placeholder 3"/>
+          <p:cNvSpPr>
+            <a:spLocks noGrp="1"/>
+          </p:cNvSpPr>
+          <p:nvPr>
+            <p:ph type="sldNum" sz="quarter" idx="5"/>
+          </p:nvPr>
+        </p:nvSpPr>
+        <p:spPr/>
+        <p:txBody>
+          <a:bodyPr/>
+          <a:lstStyle/>
+          <a:p>
+            <a:fld id="{7B721744-D43C-422F-B42D-F891E80211BA}" type="slidenum">
+              <a:rPr lang="ru-RU" smtClean="0"/>
+              <a:t>9</a:t>
+            </a:fld>
+            <a:endParaRPr lang="ru-RU"/>
+          </a:p>
+        </p:txBody>
+      </p:sp>
+    </p:spTree>
+    <p:extLst>
+      <p:ext uri="{BB962C8B-B14F-4D97-AF65-F5344CB8AC3E}">
+        <p14:creationId xmlns:p14="http://schemas.microsoft.com/office/powerpoint/2010/main" val="1221034924"/>
       </p:ext>
     </p:extLst>
   </p:cSld>
@@ -710,7 +2849,7 @@
           <a:p>
             <a:fld id="{E2D3E6BD-B4C5-4C5E-AC73-5E733A3CDA2C}" type="datetime1">
               <a:rPr lang="ru-RU" smtClean="0"/>
-              <a:t>23.06.2026</a:t>
+              <a:t>24.06.2026</a:t>
             </a:fld>
             <a:endParaRPr lang="ru-RU"/>
           </a:p>
@@ -908,7 +3047,7 @@
           <a:p>
             <a:fld id="{D7D4D24D-E8DE-46D2-B2EA-B77A9C5FF877}" type="datetime1">
               <a:rPr lang="ru-RU" smtClean="0"/>
-              <a:t>23.06.2026</a:t>
+              <a:t>24.06.2026</a:t>
             </a:fld>
             <a:endParaRPr lang="ru-RU"/>
           </a:p>
@@ -1116,7 +3255,7 @@
           <a:p>
             <a:fld id="{67B76F11-00B9-4E07-B295-6CA67D2F7E8B}" type="datetime1">
               <a:rPr lang="ru-RU" smtClean="0"/>
-              <a:t>23.06.2026</a:t>
+              <a:t>24.06.2026</a:t>
             </a:fld>
             <a:endParaRPr lang="ru-RU"/>
           </a:p>
@@ -1314,7 +3453,7 @@
           <a:p>
             <a:fld id="{63954F16-EF89-444B-B5EE-096ABF5F48C7}" type="datetime1">
               <a:rPr lang="ru-RU" smtClean="0"/>
-              <a:t>23.06.2026</a:t>
+              <a:t>24.06.2026</a:t>
             </a:fld>
             <a:endParaRPr lang="ru-RU"/>
           </a:p>
@@ -1589,7 +3728,7 @@
           <a:p>
             <a:fld id="{26E6D5F6-1A3B-4480-A930-7B5D513F4301}" type="datetime1">
               <a:rPr lang="ru-RU" smtClean="0"/>
-              <a:t>23.06.2026</a:t>
+              <a:t>24.06.2026</a:t>
             </a:fld>
             <a:endParaRPr lang="ru-RU"/>
           </a:p>
@@ -1854,7 +3993,7 @@
           <a:p>
             <a:fld id="{C0461997-42E7-4A3D-AFD9-A4B06E9A2CD4}" type="datetime1">
               <a:rPr lang="ru-RU" smtClean="0"/>
-              <a:t>23.06.2026</a:t>
+              <a:t>24.06.2026</a:t>
             </a:fld>
             <a:endParaRPr lang="ru-RU"/>
           </a:p>
@@ -2266,7 +4405,7 @@
           <a:p>
             <a:fld id="{00D1E04C-46DC-49F7-BB58-C0F68A028918}" type="datetime1">
               <a:rPr lang="ru-RU" smtClean="0"/>
-              <a:t>23.06.2026</a:t>
+              <a:t>24.06.2026</a:t>
             </a:fld>
             <a:endParaRPr lang="ru-RU"/>
           </a:p>
@@ -2407,7 +4546,7 @@
           <a:p>
             <a:fld id="{42BDAAF7-7DCA-4B59-8EFF-412AF87020B2}" type="datetime1">
               <a:rPr lang="ru-RU" smtClean="0"/>
-              <a:t>23.06.2026</a:t>
+              <a:t>24.06.2026</a:t>
             </a:fld>
             <a:endParaRPr lang="ru-RU"/>
           </a:p>
@@ -2520,7 +4659,7 @@
           <a:p>
             <a:fld id="{09C9192A-75AA-4314-85F0-C37E684E0F1B}" type="datetime1">
               <a:rPr lang="ru-RU" smtClean="0"/>
-              <a:t>23.06.2026</a:t>
+              <a:t>24.06.2026</a:t>
             </a:fld>
             <a:endParaRPr lang="ru-RU"/>
           </a:p>
@@ -2831,7 +4970,7 @@
           <a:p>
             <a:fld id="{1EA6CD73-1DC1-4CCB-8639-48CA902A4BE7}" type="datetime1">
               <a:rPr lang="ru-RU" smtClean="0"/>
-              <a:t>23.06.2026</a:t>
+              <a:t>24.06.2026</a:t>
             </a:fld>
             <a:endParaRPr lang="ru-RU"/>
           </a:p>
@@ -3119,7 +5258,7 @@
           <a:p>
             <a:fld id="{25FEEA16-318D-49A8-B19A-6FCF07807A8C}" type="datetime1">
               <a:rPr lang="ru-RU" smtClean="0"/>
-              <a:t>23.06.2026</a:t>
+              <a:t>24.06.2026</a:t>
             </a:fld>
             <a:endParaRPr lang="ru-RU"/>
           </a:p>
@@ -3360,7 +5499,7 @@
           <a:p>
             <a:fld id="{29DA6B07-345E-41F3-AB13-E427DFAF8E87}" type="datetime1">
               <a:rPr lang="ru-RU" smtClean="0"/>
-              <a:t>23.06.2026</a:t>
+              <a:t>24.06.2026</a:t>
             </a:fld>
             <a:endParaRPr lang="ru-RU"/>
           </a:p>
@@ -4324,7 +6463,7 @@
           <p:nvPr/>
         </p:nvPicPr>
         <p:blipFill>
-          <a:blip r:embed="rId2">
+          <a:blip r:embed="rId3">
             <a:extLst>
               <a:ext uri="{28A0092B-C50C-407E-A947-70E740481C1C}">
                 <a14:useLocalDpi xmlns:a14="http://schemas.microsoft.com/office/drawing/2010/main" val="0"/>
@@ -4360,7 +6499,7 @@
           <p:nvPr/>
         </p:nvPicPr>
         <p:blipFill>
-          <a:blip r:embed="rId3">
+          <a:blip r:embed="rId4">
             <a:extLst>
               <a:ext uri="{28A0092B-C50C-407E-A947-70E740481C1C}">
                 <a14:useLocalDpi xmlns:a14="http://schemas.microsoft.com/office/drawing/2010/main" val="0"/>
@@ -4689,7 +6828,7 @@
           </p:nvPr>
         </p:nvPicPr>
         <p:blipFill>
-          <a:blip r:embed="rId2">
+          <a:blip r:embed="rId3">
             <a:extLst>
               <a:ext uri="{28A0092B-C50C-407E-A947-70E740481C1C}">
                 <a14:useLocalDpi xmlns:a14="http://schemas.microsoft.com/office/drawing/2010/main" val="0"/>
@@ -5693,7 +7832,7 @@
           </p:nvPr>
         </p:nvPicPr>
         <p:blipFill>
-          <a:blip r:embed="rId2">
+          <a:blip r:embed="rId3">
             <a:extLst>
               <a:ext uri="{28A0092B-C50C-407E-A947-70E740481C1C}">
                 <a14:useLocalDpi xmlns:a14="http://schemas.microsoft.com/office/drawing/2010/main" val="0"/>
@@ -5726,7 +7865,7 @@
           <p:nvPr/>
         </p:nvPicPr>
         <p:blipFill>
-          <a:blip r:embed="rId3">
+          <a:blip r:embed="rId4">
             <a:extLst>
               <a:ext uri="{28A0092B-C50C-407E-A947-70E740481C1C}">
                 <a14:useLocalDpi xmlns:a14="http://schemas.microsoft.com/office/drawing/2010/main" val="0"/>
@@ -5859,7 +7998,7 @@
           <p:nvPr/>
         </p:nvPicPr>
         <p:blipFill>
-          <a:blip r:embed="rId2">
+          <a:blip r:embed="rId3">
             <a:extLst>
               <a:ext uri="{28A0092B-C50C-407E-A947-70E740481C1C}">
                 <a14:useLocalDpi xmlns:a14="http://schemas.microsoft.com/office/drawing/2010/main" val="0"/>
@@ -5897,7 +8036,7 @@
           </p:nvPr>
         </p:nvPicPr>
         <p:blipFill>
-          <a:blip r:embed="rId3">
+          <a:blip r:embed="rId4">
             <a:extLst>
               <a:ext uri="{28A0092B-C50C-407E-A947-70E740481C1C}">
                 <a14:useLocalDpi xmlns:a14="http://schemas.microsoft.com/office/drawing/2010/main" val="0"/>
@@ -6025,7 +8164,7 @@
           </p:nvPr>
         </p:nvPicPr>
         <p:blipFill>
-          <a:blip r:embed="rId2">
+          <a:blip r:embed="rId3">
             <a:extLst>
               <a:ext uri="{28A0092B-C50C-407E-A947-70E740481C1C}">
                 <a14:useLocalDpi xmlns:a14="http://schemas.microsoft.com/office/drawing/2010/main" val="0"/>
@@ -6076,7 +8215,21 @@
                 <a:latin typeface="Times New Roman" panose="02020603050405020304" pitchFamily="18" charset="0"/>
                 <a:cs typeface="Times New Roman" panose="02020603050405020304" pitchFamily="18" charset="0"/>
               </a:rPr>
-              <a:t>При сильном сжатии (JPEG = 80) модель сохраняет приемлемую точность</a:t>
+              <a:t>При сильном сжатии (JPEG = </a:t>
+            </a:r>
+            <a:r>
+              <a:rPr lang="vi-VN" dirty="0">
+                <a:latin typeface="Times New Roman" panose="02020603050405020304" pitchFamily="18" charset="0"/>
+                <a:cs typeface="Times New Roman" panose="02020603050405020304" pitchFamily="18" charset="0"/>
+              </a:rPr>
+              <a:t>80%</a:t>
+            </a:r>
+            <a:r>
+              <a:rPr lang="ru-RU" dirty="0">
+                <a:latin typeface="Times New Roman" panose="02020603050405020304" pitchFamily="18" charset="0"/>
+                <a:cs typeface="Times New Roman" panose="02020603050405020304" pitchFamily="18" charset="0"/>
+              </a:rPr>
+              <a:t>) модель сохраняет приемлемую точность</a:t>
             </a:r>
             <a:r>
               <a:rPr lang="en-US" dirty="0">
@@ -8523,7 +10676,7 @@
           </p:nvPr>
         </p:nvPicPr>
         <p:blipFill>
-          <a:blip r:embed="rId2">
+          <a:blip r:embed="rId3">
             <a:extLst>
               <a:ext uri="{28A0092B-C50C-407E-A947-70E740481C1C}">
                 <a14:useLocalDpi xmlns:a14="http://schemas.microsoft.com/office/drawing/2010/main" val="0"/>
@@ -8709,7 +10862,7 @@
           </p:nvPr>
         </p:nvPicPr>
         <p:blipFill>
-          <a:blip r:embed="rId2">
+          <a:blip r:embed="rId3">
             <a:extLst>
               <a:ext uri="{28A0092B-C50C-407E-A947-70E740481C1C}">
                 <a14:useLocalDpi xmlns:a14="http://schemas.microsoft.com/office/drawing/2010/main" val="0"/>
@@ -8925,7 +11078,7 @@
           </p:nvPr>
         </p:nvPicPr>
         <p:blipFill>
-          <a:blip r:embed="rId2">
+          <a:blip r:embed="rId3">
             <a:extLst>
               <a:ext uri="{28A0092B-C50C-407E-A947-70E740481C1C}">
                 <a14:useLocalDpi xmlns:a14="http://schemas.microsoft.com/office/drawing/2010/main" val="0"/>
@@ -9055,7 +11208,7 @@
           </p:nvPr>
         </p:nvPicPr>
         <p:blipFill>
-          <a:blip r:embed="rId2">
+          <a:blip r:embed="rId3">
             <a:extLst>
               <a:ext uri="{28A0092B-C50C-407E-A947-70E740481C1C}">
                 <a14:useLocalDpi xmlns:a14="http://schemas.microsoft.com/office/drawing/2010/main" val="0"/>
@@ -9277,7 +11430,7 @@
           <p:nvPr/>
         </p:nvPicPr>
         <p:blipFill>
-          <a:blip r:embed="rId2">
+          <a:blip r:embed="rId3">
             <a:extLst>
               <a:ext uri="{28A0092B-C50C-407E-A947-70E740481C1C}">
                 <a14:useLocalDpi xmlns:a14="http://schemas.microsoft.com/office/drawing/2010/main" val="0"/>
@@ -9313,7 +11466,7 @@
           <p:nvPr/>
         </p:nvPicPr>
         <p:blipFill>
-          <a:blip r:embed="rId3">
+          <a:blip r:embed="rId4">
             <a:extLst>
               <a:ext uri="{28A0092B-C50C-407E-A947-70E740481C1C}">
                 <a14:useLocalDpi xmlns:a14="http://schemas.microsoft.com/office/drawing/2010/main" val="0"/>
